--- a/paper_presentation_refined.pptx
+++ b/paper_presentation_refined.pptx
@@ -18054,109 +18054,3390 @@
           </a:p>
         </p:txBody>
       </p:sp>
-      <p:pic>
-        <p:nvPicPr>
-          <p:cNvPr id="173" name="Picture 172" descr="fig1_pipeline_threat_model.png"/>
-          <p:cNvPicPr>
-            <a:picLocks noChangeAspect="1"/>
-          </p:cNvPicPr>
+      <p:sp>
+        <p:nvSpPr>
+          <p:cNvPr id="173" name="Rectangle 172"/>
+          <p:cNvSpPr/>
           <p:nvPr/>
-        </p:nvPicPr>
-        <p:blipFill>
-          <a:blip r:embed="rId2"/>
-          <a:stretch>
-            <a:fillRect/>
-          </a:stretch>
-        </p:blipFill>
-        <p:spPr>
-          <a:xfrm>
-            <a:off x="320040" y="1325880"/>
-            <a:ext cx="6309360" cy="3425456"/>
+        </p:nvSpPr>
+        <p:spPr>
+          <a:xfrm>
+            <a:off x="274320" y="1325880"/>
+            <a:ext cx="1783080" cy="228600"/>
           </a:xfrm>
           <a:prstGeom prst="rect">
             <a:avLst/>
           </a:prstGeom>
-        </p:spPr>
-      </p:pic>
-      <p:sp>
-        <p:nvSpPr>
-          <p:cNvPr id="174" name="TextBox 173"/>
-          <p:cNvSpPr txBox="1"/>
+          <a:noFill/>
+          <a:ln>
+            <a:noFill/>
+          </a:ln>
+          <a:effectLst/>
+        </p:spPr>
+        <p:style>
+          <a:lnRef idx="1">
+            <a:schemeClr val="accent1"/>
+          </a:lnRef>
+          <a:fillRef idx="3">
+            <a:schemeClr val="accent1"/>
+          </a:fillRef>
+          <a:effectRef idx="2">
+            <a:schemeClr val="accent1"/>
+          </a:effectRef>
+          <a:fontRef idx="minor">
+            <a:schemeClr val="lt1"/>
+          </a:fontRef>
+        </p:style>
+        <p:txBody>
+          <a:bodyPr rtlCol="0" anchor="t" wrap="square" lIns="45720" rIns="45720" tIns="18288" bIns="18288"/>
+          <a:lstStyle/>
+          <a:p>
+            <a:pPr algn="l"/>
+            <a:r>
+              <a:rPr sz="800" b="1" i="0">
+                <a:solidFill>
+                  <a:srgbClr val="6B6B6B"/>
+                </a:solidFill>
+                <a:latin typeface="Arial"/>
+              </a:rPr>
+              <a:t>UNTRUSTED RF ENVIRONMENT</a:t>
+            </a:r>
+          </a:p>
+        </p:txBody>
+      </p:sp>
+      <p:sp>
+        <p:nvSpPr>
+          <p:cNvPr id="174" name="Legitimate transmitter"/>
+          <p:cNvSpPr/>
           <p:nvPr/>
         </p:nvSpPr>
         <p:spPr>
           <a:xfrm>
-            <a:off x="6858000" y="1417320"/>
-            <a:ext cx="1965960" cy="3291840"/>
-          </a:xfrm>
-          <a:prstGeom prst="rect">
-            <a:avLst/>
-          </a:prstGeom>
-          <a:noFill/>
-        </p:spPr>
+            <a:off x="274320" y="1600200"/>
+            <a:ext cx="1463040" cy="457200"/>
+          </a:xfrm>
+          <a:prstGeom prst="roundRect">
+            <a:avLst>
+              <a:gd name="adj" fmla="val 8000"/>
+            </a:avLst>
+          </a:prstGeom>
+          <a:solidFill>
+            <a:srgbClr val="F1F3F6"/>
+          </a:solidFill>
+          <a:ln w="9525">
+            <a:solidFill>
+              <a:srgbClr val="4A5568"/>
+            </a:solidFill>
+          </a:ln>
+          <a:effectLst/>
+        </p:spPr>
+        <p:style>
+          <a:lnRef idx="1">
+            <a:schemeClr val="accent1"/>
+          </a:lnRef>
+          <a:fillRef idx="3">
+            <a:schemeClr val="accent1"/>
+          </a:fillRef>
+          <a:effectRef idx="2">
+            <a:schemeClr val="accent1"/>
+          </a:effectRef>
+          <a:fontRef idx="minor">
+            <a:schemeClr val="lt1"/>
+          </a:fontRef>
+        </p:style>
         <p:txBody>
-          <a:bodyPr wrap="square">
-            <a:spAutoFit/>
-          </a:bodyPr>
+          <a:bodyPr rtlCol="0" anchor="ctr" wrap="square" lIns="45720" rIns="45720" tIns="18288" bIns="18288"/>
           <a:lstStyle/>
           <a:p>
-            <a:pPr>
-              <a:spcAft>
-                <a:spcPts val="400"/>
-              </a:spcAft>
-            </a:pPr>
-            <a:r>
-              <a:rPr sz="1200" i="0" b="1">
+            <a:pPr algn="ctr"/>
+            <a:r>
+              <a:rPr sz="900" b="1" i="0">
                 <a:solidFill>
                   <a:srgbClr val="333333"/>
                 </a:solidFill>
+                <a:latin typeface="Arial"/>
               </a:rPr>
-              <a:t>This work: AP5</a:t>
-            </a:r>
-          </a:p>
-          <a:p>
-            <a:pPr>
-              <a:spcAft>
-                <a:spcPts val="400"/>
-              </a:spcAft>
-            </a:pPr>
-            <a:r>
-              <a:rPr sz="1200" i="0" b="0">
+              <a:t>Legitimate transmitter</a:t>
+            </a:r>
+          </a:p>
+          <a:p>
+            <a:pPr algn="ctr"/>
+            <a:r>
+              <a:rPr sz="800" b="0" i="0">
+                <a:solidFill>
+                  <a:srgbClr val="6B6B6B"/>
+                </a:solidFill>
+                <a:latin typeface="Arial"/>
+              </a:rPr>
+              <a:t>burst waveform s[n]</a:t>
+            </a:r>
+          </a:p>
+        </p:txBody>
+      </p:sp>
+      <p:sp>
+        <p:nvSpPr>
+          <p:cNvPr id="175" name="RF attacker A1"/>
+          <p:cNvSpPr/>
+          <p:nvPr/>
+        </p:nvSpPr>
+        <p:spPr>
+          <a:xfrm>
+            <a:off x="274320" y="2514600"/>
+            <a:ext cx="1463040" cy="1024128"/>
+          </a:xfrm>
+          <a:prstGeom prst="roundRect">
+            <a:avLst>
+              <a:gd name="adj" fmla="val 8000"/>
+            </a:avLst>
+          </a:prstGeom>
+          <a:solidFill>
+            <a:srgbClr val="FDECEA"/>
+          </a:solidFill>
+          <a:ln w="15875">
+            <a:solidFill>
+              <a:srgbClr val="C0392B"/>
+            </a:solidFill>
+          </a:ln>
+          <a:effectLst/>
+        </p:spPr>
+        <p:style>
+          <a:lnRef idx="1">
+            <a:schemeClr val="accent1"/>
+          </a:lnRef>
+          <a:fillRef idx="3">
+            <a:schemeClr val="accent1"/>
+          </a:fillRef>
+          <a:effectRef idx="2">
+            <a:schemeClr val="accent1"/>
+          </a:effectRef>
+          <a:fontRef idx="minor">
+            <a:schemeClr val="lt1"/>
+          </a:fontRef>
+        </p:style>
+        <p:txBody>
+          <a:bodyPr rtlCol="0" anchor="t" wrap="square" lIns="45720" rIns="45720" tIns="18288" bIns="18288"/>
+          <a:lstStyle/>
+          <a:p>
+            <a:pPr algn="l"/>
+            <a:r>
+              <a:rPr sz="1000" b="1" i="0">
+                <a:solidFill>
+                  <a:srgbClr val="C0392B"/>
+                </a:solidFill>
+                <a:latin typeface="Arial"/>
+              </a:rPr>
+              <a:t>RF attacker (A1)</a:t>
+            </a:r>
+          </a:p>
+          <a:p>
+            <a:pPr algn="l"/>
+            <a:r>
+              <a:rPr sz="800" b="0" i="0">
                 <a:solidFill>
                   <a:srgbClr val="333333"/>
                 </a:solidFill>
+                <a:latin typeface="Arial"/>
               </a:rPr>
-              <a:t>AMC evasion (G6) on a detected 128-sample window</a:t>
-            </a:r>
-          </a:p>
-          <a:p>
-            <a:pPr>
-              <a:spcAft>
-                <a:spcPts val="400"/>
-              </a:spcAft>
-            </a:pPr>
-            <a:r>
-              <a:rPr sz="1200" i="0" b="0">
+              <a:t>Independent SDR</a:t>
+            </a:r>
+          </a:p>
+          <a:p>
+            <a:pPr algn="l"/>
+            <a:r>
+              <a:rPr sz="800" b="0" i="0">
                 <a:solidFill>
                   <a:srgbClr val="333333"/>
                 </a:solidFill>
+                <a:latin typeface="Arial"/>
               </a:rPr>
-              <a:t>AP1–AP4, AP6: sensing and event-level attacks → future work</a:t>
-            </a:r>
-          </a:p>
-          <a:p>
-            <a:pPr>
-              <a:spcAft>
-                <a:spcPts val="400"/>
-              </a:spcAft>
-            </a:pPr>
-            <a:r>
-              <a:rPr sz="1200" i="0" b="0">
+              <a:t>Additive waveform a[n]</a:t>
+            </a:r>
+          </a:p>
+          <a:p>
+            <a:pPr algn="l"/>
+            <a:r>
+              <a:rPr sz="800" b="0" i="0">
                 <a:solidFill>
                   <a:srgbClr val="333333"/>
                 </a:solidFill>
+                <a:latin typeface="Arial"/>
               </a:rPr>
-              <a:t>Excluded: host compromise, checkpoint swap, perfect phase-synced cancellation</a:t>
+              <a:t>Controls power, BW,</a:t>
+            </a:r>
+          </a:p>
+          <a:p>
+            <a:pPr algn="l"/>
+            <a:r>
+              <a:rPr sz="800" b="0" i="0">
+                <a:solidFill>
+                  <a:srgbClr val="333333"/>
+                </a:solidFill>
+                <a:latin typeface="Arial"/>
+              </a:rPr>
+              <a:t>timing, duty cycle</a:t>
+            </a:r>
+          </a:p>
+          <a:p>
+            <a:pPr algn="l"/>
+            <a:r>
+              <a:rPr sz="800" b="0" i="0">
+                <a:solidFill>
+                  <a:srgbClr val="333333"/>
+                </a:solidFill>
+                <a:latin typeface="Arial"/>
+              </a:rPr>
+              <a:t>No host access</a:t>
+            </a:r>
+          </a:p>
+          <a:p>
+            <a:pPr algn="l"/>
+            <a:r>
+              <a:rPr sz="800" b="0" i="0">
+                <a:solidFill>
+                  <a:srgbClr val="333333"/>
+                </a:solidFill>
+                <a:latin typeface="Arial"/>
+              </a:rPr>
+              <a:t>No phase sync</a:t>
+            </a:r>
+          </a:p>
+        </p:txBody>
+      </p:sp>
+      <p:sp>
+        <p:nvSpPr>
+          <p:cNvPr id="176" name="RF superposition"/>
+          <p:cNvSpPr/>
+          <p:nvPr/>
+        </p:nvSpPr>
+        <p:spPr>
+          <a:xfrm>
+            <a:off x="1810512" y="2075688"/>
+            <a:ext cx="237744" cy="237744"/>
+          </a:xfrm>
+          <a:prstGeom prst="ellipse">
+            <a:avLst/>
+          </a:prstGeom>
+          <a:solidFill>
+            <a:srgbClr val="FFFFFF"/>
+          </a:solidFill>
+          <a:ln w="9525">
+            <a:solidFill>
+              <a:srgbClr val="4A5568"/>
+            </a:solidFill>
+          </a:ln>
+          <a:effectLst/>
+        </p:spPr>
+        <p:style>
+          <a:lnRef idx="1">
+            <a:schemeClr val="accent1"/>
+          </a:lnRef>
+          <a:fillRef idx="3">
+            <a:schemeClr val="accent1"/>
+          </a:fillRef>
+          <a:effectRef idx="2">
+            <a:schemeClr val="accent1"/>
+          </a:effectRef>
+          <a:fontRef idx="minor">
+            <a:schemeClr val="lt1"/>
+          </a:fontRef>
+        </p:style>
+        <p:txBody>
+          <a:bodyPr rtlCol="0" anchor="ctr" wrap="square" lIns="45720" rIns="45720" tIns="18288" bIns="18288"/>
+          <a:lstStyle/>
+          <a:p>
+            <a:pPr algn="ctr"/>
+            <a:r>
+              <a:rPr sz="1100" b="1" i="0">
+                <a:solidFill>
+                  <a:srgbClr val="333333"/>
+                </a:solidFill>
+                <a:latin typeface="Arial"/>
+              </a:rPr>
+              <a:t>+</a:t>
+            </a:r>
+          </a:p>
+        </p:txBody>
+      </p:sp>
+      <p:cxnSp>
+        <p:nvCxnSpPr>
+          <p:cNvPr id="177" name="Connector 176"/>
+          <p:cNvCxnSpPr/>
+          <p:nvPr/>
+        </p:nvCxnSpPr>
+        <p:spPr>
+          <a:xfrm>
+            <a:off x="1737360" y="1828800"/>
+            <a:ext cx="91440" cy="283464"/>
+          </a:xfrm>
+          <a:prstGeom prst="line">
+            <a:avLst/>
+          </a:prstGeom>
+          <a:ln w="12700">
+            <a:solidFill>
+              <a:srgbClr val="4A5568"/>
+            </a:solidFill>
+          </a:ln>
+        </p:spPr>
+        <p:style>
+          <a:lnRef idx="2">
+            <a:schemeClr val="accent1"/>
+          </a:lnRef>
+          <a:fillRef idx="0">
+            <a:schemeClr val="accent1"/>
+          </a:fillRef>
+          <a:effectRef idx="1">
+            <a:schemeClr val="accent1"/>
+          </a:effectRef>
+          <a:fontRef idx="minor">
+            <a:schemeClr val="tx1"/>
+          </a:fontRef>
+        </p:style>
+      </p:cxnSp>
+      <p:cxnSp>
+        <p:nvCxnSpPr>
+          <p:cNvPr id="178" name="Connector 177"/>
+          <p:cNvCxnSpPr/>
+          <p:nvPr/>
+        </p:nvCxnSpPr>
+        <p:spPr>
+          <a:xfrm flipV="1">
+            <a:off x="1737360" y="2313432"/>
+            <a:ext cx="192024" cy="521208"/>
+          </a:xfrm>
+          <a:prstGeom prst="line">
+            <a:avLst/>
+          </a:prstGeom>
+          <a:ln w="19050">
+            <a:solidFill>
+              <a:srgbClr val="C0392B"/>
+            </a:solidFill>
+          </a:ln>
+        </p:spPr>
+        <p:style>
+          <a:lnRef idx="2">
+            <a:schemeClr val="accent1"/>
+          </a:lnRef>
+          <a:fillRef idx="0">
+            <a:schemeClr val="accent1"/>
+          </a:fillRef>
+          <a:effectRef idx="1">
+            <a:schemeClr val="accent1"/>
+          </a:effectRef>
+          <a:fontRef idx="minor">
+            <a:schemeClr val="tx1"/>
+          </a:fontRef>
+        </p:style>
+      </p:cxnSp>
+      <p:sp>
+        <p:nvSpPr>
+          <p:cNvPr id="179" name="Rectangle 178"/>
+          <p:cNvSpPr/>
+          <p:nvPr/>
+        </p:nvSpPr>
+        <p:spPr>
+          <a:xfrm>
+            <a:off x="274320" y="3657600"/>
+            <a:ext cx="1783080" cy="411480"/>
+          </a:xfrm>
+          <a:prstGeom prst="rect">
+            <a:avLst/>
+          </a:prstGeom>
+          <a:noFill/>
+          <a:ln>
+            <a:noFill/>
+          </a:ln>
+          <a:effectLst/>
+        </p:spPr>
+        <p:style>
+          <a:lnRef idx="1">
+            <a:schemeClr val="accent1"/>
+          </a:lnRef>
+          <a:fillRef idx="3">
+            <a:schemeClr val="accent1"/>
+          </a:fillRef>
+          <a:effectRef idx="2">
+            <a:schemeClr val="accent1"/>
+          </a:effectRef>
+          <a:fontRef idx="minor">
+            <a:schemeClr val="lt1"/>
+          </a:fontRef>
+        </p:style>
+        <p:txBody>
+          <a:bodyPr rtlCol="0" anchor="t" wrap="square" lIns="45720" rIns="45720" tIns="18288" bIns="18288"/>
+          <a:lstStyle/>
+          <a:p>
+            <a:pPr algn="l"/>
+            <a:r>
+              <a:rPr sz="750" b="0" i="0">
+                <a:solidFill>
+                  <a:srgbClr val="6B6B6B"/>
+                </a:solidFill>
+                <a:latin typeface="Arial"/>
+              </a:rPr>
+              <a:t>RF superposition: y[n] = h_s*s + h_a*a + w</a:t>
+            </a:r>
+          </a:p>
+        </p:txBody>
+      </p:sp>
+      <p:sp>
+        <p:nvSpPr>
+          <p:cNvPr id="180" name="Rectangle 179"/>
+          <p:cNvSpPr/>
+          <p:nvPr/>
+        </p:nvSpPr>
+        <p:spPr>
+          <a:xfrm>
+            <a:off x="274320" y="4224528"/>
+            <a:ext cx="1783080" cy="594360"/>
+          </a:xfrm>
+          <a:prstGeom prst="rect">
+            <a:avLst/>
+          </a:prstGeom>
+          <a:noFill/>
+          <a:ln>
+            <a:noFill/>
+          </a:ln>
+          <a:effectLst/>
+        </p:spPr>
+        <p:style>
+          <a:lnRef idx="1">
+            <a:schemeClr val="accent1"/>
+          </a:lnRef>
+          <a:fillRef idx="3">
+            <a:schemeClr val="accent1"/>
+          </a:fillRef>
+          <a:effectRef idx="2">
+            <a:schemeClr val="accent1"/>
+          </a:effectRef>
+          <a:fontRef idx="minor">
+            <a:schemeClr val="lt1"/>
+          </a:fontRef>
+        </p:style>
+        <p:txBody>
+          <a:bodyPr rtlCol="0" anchor="t" wrap="square" lIns="45720" rIns="45720" tIns="18288" bIns="18288"/>
+          <a:lstStyle/>
+          <a:p>
+            <a:pPr algn="l"/>
+            <a:r>
+              <a:rPr sz="700" b="0" i="0">
+                <a:solidFill>
+                  <a:srgbClr val="6B6B6B"/>
+                </a:solidFill>
+                <a:latin typeface="Arial"/>
+              </a:rPr>
+              <a:t>Excluded: host compromise, checkpoint swap, metadata tampering, perfect phase-synced cancellation</a:t>
+            </a:r>
+          </a:p>
+        </p:txBody>
+      </p:sp>
+      <p:sp>
+        <p:nvSpPr>
+          <p:cNvPr id="181" name="Defender node boundary"/>
+          <p:cNvSpPr/>
+          <p:nvPr/>
+        </p:nvSpPr>
+        <p:spPr>
+          <a:xfrm>
+            <a:off x="2176272" y="1371600"/>
+            <a:ext cx="6693408" cy="2990088"/>
+          </a:xfrm>
+          <a:prstGeom prst="roundRect">
+            <a:avLst>
+              <a:gd name="adj" fmla="val 4000"/>
+            </a:avLst>
+          </a:prstGeom>
+          <a:noFill/>
+          <a:ln w="15875">
+            <a:solidFill>
+              <a:srgbClr val="4A5568"/>
+            </a:solidFill>
+            <a:prstDash val="dash"/>
+          </a:ln>
+          <a:effectLst/>
+        </p:spPr>
+        <p:style>
+          <a:lnRef idx="1">
+            <a:schemeClr val="accent1"/>
+          </a:lnRef>
+          <a:fillRef idx="3">
+            <a:schemeClr val="accent1"/>
+          </a:fillRef>
+          <a:effectRef idx="2">
+            <a:schemeClr val="accent1"/>
+          </a:effectRef>
+          <a:fontRef idx="minor">
+            <a:schemeClr val="lt1"/>
+          </a:fontRef>
+        </p:style>
+        <p:txBody>
+          <a:bodyPr rtlCol="0" anchor="ctr" wrap="square" lIns="45720" rIns="45720" tIns="18288" bIns="18288"/>
+          <a:lstStyle/>
+          <a:p>
+            <a:pPr algn="ctr"/>
+            <a:r>
+              <a:rPr sz="900" b="0" i="0">
+                <a:solidFill>
+                  <a:srgbClr val="333333"/>
+                </a:solidFill>
+                <a:latin typeface="Arial"/>
+              </a:rPr>
+              <a:t/>
+            </a:r>
+          </a:p>
+        </p:txBody>
+      </p:sp>
+      <p:sp>
+        <p:nvSpPr>
+          <p:cNvPr id="182" name="Rectangle 181"/>
+          <p:cNvSpPr/>
+          <p:nvPr/>
+        </p:nvSpPr>
+        <p:spPr>
+          <a:xfrm>
+            <a:off x="2331720" y="1389888"/>
+            <a:ext cx="4572000" cy="201168"/>
+          </a:xfrm>
+          <a:prstGeom prst="rect">
+            <a:avLst/>
+          </a:prstGeom>
+          <a:noFill/>
+          <a:ln>
+            <a:noFill/>
+          </a:ln>
+          <a:effectLst/>
+        </p:spPr>
+        <p:style>
+          <a:lnRef idx="1">
+            <a:schemeClr val="accent1"/>
+          </a:lnRef>
+          <a:fillRef idx="3">
+            <a:schemeClr val="accent1"/>
+          </a:fillRef>
+          <a:effectRef idx="2">
+            <a:schemeClr val="accent1"/>
+          </a:effectRef>
+          <a:fontRef idx="minor">
+            <a:schemeClr val="lt1"/>
+          </a:fontRef>
+        </p:style>
+        <p:txBody>
+          <a:bodyPr rtlCol="0" anchor="t" wrap="square" lIns="45720" rIns="45720" tIns="18288" bIns="18288"/>
+          <a:lstStyle/>
+          <a:p>
+            <a:pPr algn="l"/>
+            <a:r>
+              <a:rPr sz="800" b="1" i="0">
+                <a:solidFill>
+                  <a:srgbClr val="6B6B6B"/>
+                </a:solidFill>
+                <a:latin typeface="Arial"/>
+              </a:rPr>
+              <a:t>DEFENDER-CONTROLLED MONITORING NODE</a:t>
+            </a:r>
+          </a:p>
+        </p:txBody>
+      </p:sp>
+      <p:cxnSp>
+        <p:nvCxnSpPr>
+          <p:cNvPr id="183" name="Connector 182"/>
+          <p:cNvCxnSpPr/>
+          <p:nvPr/>
+        </p:nvCxnSpPr>
+        <p:spPr>
+          <a:xfrm>
+            <a:off x="2048256" y="2194560"/>
+            <a:ext cx="219456" cy="0"/>
+          </a:xfrm>
+          <a:prstGeom prst="line">
+            <a:avLst/>
+          </a:prstGeom>
+          <a:ln w="19050">
+            <a:solidFill>
+              <a:srgbClr val="C0392B"/>
+            </a:solidFill>
+            <a:tailEnd type="triangle" w="med" len="med"/>
+          </a:ln>
+        </p:spPr>
+        <p:style>
+          <a:lnRef idx="2">
+            <a:schemeClr val="accent1"/>
+          </a:lnRef>
+          <a:fillRef idx="0">
+            <a:schemeClr val="accent1"/>
+          </a:fillRef>
+          <a:effectRef idx="1">
+            <a:schemeClr val="accent1"/>
+          </a:effectRef>
+          <a:fontRef idx="minor">
+            <a:schemeClr val="tx1"/>
+          </a:fontRef>
+        </p:style>
+      </p:cxnSp>
+      <p:sp>
+        <p:nvSpPr>
+          <p:cNvPr id="184" name="Stage 1 header"/>
+          <p:cNvSpPr/>
+          <p:nvPr/>
+        </p:nvSpPr>
+        <p:spPr>
+          <a:xfrm>
+            <a:off x="2286000" y="1645920"/>
+            <a:ext cx="1517904" cy="274320"/>
+          </a:xfrm>
+          <a:prstGeom prst="roundRect">
+            <a:avLst>
+              <a:gd name="adj" fmla="val 15000"/>
+            </a:avLst>
+          </a:prstGeom>
+          <a:solidFill>
+            <a:srgbClr val="E4E8EE"/>
+          </a:solidFill>
+          <a:ln w="9525">
+            <a:solidFill>
+              <a:srgbClr val="4A5568"/>
+            </a:solidFill>
+          </a:ln>
+          <a:effectLst/>
+        </p:spPr>
+        <p:style>
+          <a:lnRef idx="1">
+            <a:schemeClr val="accent1"/>
+          </a:lnRef>
+          <a:fillRef idx="3">
+            <a:schemeClr val="accent1"/>
+          </a:fillRef>
+          <a:effectRef idx="2">
+            <a:schemeClr val="accent1"/>
+          </a:effectRef>
+          <a:fontRef idx="minor">
+            <a:schemeClr val="lt1"/>
+          </a:fontRef>
+        </p:style>
+        <p:txBody>
+          <a:bodyPr rtlCol="0" anchor="ctr" wrap="square" lIns="45720" rIns="45720" tIns="18288" bIns="18288"/>
+          <a:lstStyle/>
+          <a:p>
+            <a:pPr algn="ctr"/>
+            <a:r>
+              <a:rPr sz="850" b="1" i="0">
+                <a:solidFill>
+                  <a:srgbClr val="333333"/>
+                </a:solidFill>
+                <a:latin typeface="Arial"/>
+              </a:rPr>
+              <a:t>1  RF ACQUISITION</a:t>
+            </a:r>
+          </a:p>
+        </p:txBody>
+      </p:sp>
+      <p:sp>
+        <p:nvSpPr>
+          <p:cNvPr id="185" name="Stage 1 body"/>
+          <p:cNvSpPr/>
+          <p:nvPr/>
+        </p:nvSpPr>
+        <p:spPr>
+          <a:xfrm>
+            <a:off x="2286000" y="1920240"/>
+            <a:ext cx="1517904" cy="1536192"/>
+          </a:xfrm>
+          <a:prstGeom prst="roundRect">
+            <a:avLst>
+              <a:gd name="adj" fmla="val 4000"/>
+            </a:avLst>
+          </a:prstGeom>
+          <a:solidFill>
+            <a:srgbClr val="FFFFFF"/>
+          </a:solidFill>
+          <a:ln w="9525">
+            <a:solidFill>
+              <a:srgbClr val="4A5568"/>
+            </a:solidFill>
+          </a:ln>
+          <a:effectLst/>
+        </p:spPr>
+        <p:style>
+          <a:lnRef idx="1">
+            <a:schemeClr val="accent1"/>
+          </a:lnRef>
+          <a:fillRef idx="3">
+            <a:schemeClr val="accent1"/>
+          </a:fillRef>
+          <a:effectRef idx="2">
+            <a:schemeClr val="accent1"/>
+          </a:effectRef>
+          <a:fontRef idx="minor">
+            <a:schemeClr val="lt1"/>
+          </a:fontRef>
+        </p:style>
+        <p:txBody>
+          <a:bodyPr rtlCol="0" anchor="ctr" wrap="square" lIns="45720" rIns="45720" tIns="18288" bIns="18288"/>
+          <a:lstStyle/>
+          <a:p>
+            <a:pPr algn="ctr"/>
+            <a:r>
+              <a:rPr sz="900" b="0" i="0">
+                <a:solidFill>
+                  <a:srgbClr val="333333"/>
+                </a:solidFill>
+                <a:latin typeface="Arial"/>
+              </a:rPr>
+              <a:t/>
+            </a:r>
+          </a:p>
+        </p:txBody>
+      </p:sp>
+      <p:sp>
+        <p:nvSpPr>
+          <p:cNvPr id="186" name="Stage 1 item 1"/>
+          <p:cNvSpPr/>
+          <p:nvPr/>
+        </p:nvSpPr>
+        <p:spPr>
+          <a:xfrm>
+            <a:off x="2322576" y="1956816"/>
+            <a:ext cx="1243584" cy="246888"/>
+          </a:xfrm>
+          <a:prstGeom prst="rect">
+            <a:avLst/>
+          </a:prstGeom>
+          <a:noFill/>
+          <a:ln>
+            <a:noFill/>
+          </a:ln>
+          <a:effectLst/>
+        </p:spPr>
+        <p:style>
+          <a:lnRef idx="1">
+            <a:schemeClr val="accent1"/>
+          </a:lnRef>
+          <a:fillRef idx="3">
+            <a:schemeClr val="accent1"/>
+          </a:fillRef>
+          <a:effectRef idx="2">
+            <a:schemeClr val="accent1"/>
+          </a:effectRef>
+          <a:fontRef idx="minor">
+            <a:schemeClr val="lt1"/>
+          </a:fontRef>
+        </p:style>
+        <p:txBody>
+          <a:bodyPr rtlCol="0" anchor="ctr" wrap="square" lIns="45720" rIns="45720" tIns="18288" bIns="18288"/>
+          <a:lstStyle/>
+          <a:p>
+            <a:pPr algn="l"/>
+            <a:r>
+              <a:rPr sz="800" b="0" i="0">
+                <a:solidFill>
+                  <a:srgbClr val="333333"/>
+                </a:solidFill>
+                <a:latin typeface="Arial"/>
+              </a:rPr>
+              <a:t>Antenna / RF front end</a:t>
+            </a:r>
+          </a:p>
+        </p:txBody>
+      </p:sp>
+      <p:sp>
+        <p:nvSpPr>
+          <p:cNvPr id="187" name="Stage 1 item 2"/>
+          <p:cNvSpPr/>
+          <p:nvPr/>
+        </p:nvSpPr>
+        <p:spPr>
+          <a:xfrm>
+            <a:off x="2322576" y="2203704"/>
+            <a:ext cx="1243584" cy="246888"/>
+          </a:xfrm>
+          <a:prstGeom prst="rect">
+            <a:avLst/>
+          </a:prstGeom>
+          <a:noFill/>
+          <a:ln>
+            <a:noFill/>
+          </a:ln>
+          <a:effectLst/>
+        </p:spPr>
+        <p:style>
+          <a:lnRef idx="1">
+            <a:schemeClr val="accent1"/>
+          </a:lnRef>
+          <a:fillRef idx="3">
+            <a:schemeClr val="accent1"/>
+          </a:fillRef>
+          <a:effectRef idx="2">
+            <a:schemeClr val="accent1"/>
+          </a:effectRef>
+          <a:fontRef idx="minor">
+            <a:schemeClr val="lt1"/>
+          </a:fontRef>
+        </p:style>
+        <p:txBody>
+          <a:bodyPr rtlCol="0" anchor="ctr" wrap="square" lIns="45720" rIns="45720" tIns="18288" bIns="18288"/>
+          <a:lstStyle/>
+          <a:p>
+            <a:pPr algn="l"/>
+            <a:r>
+              <a:rPr sz="800" b="0" i="0">
+                <a:solidFill>
+                  <a:srgbClr val="333333"/>
+                </a:solidFill>
+                <a:latin typeface="Arial"/>
+              </a:rPr>
+              <a:t>ADC + downconversion</a:t>
+            </a:r>
+          </a:p>
+        </p:txBody>
+      </p:sp>
+      <p:sp>
+        <p:nvSpPr>
+          <p:cNvPr id="188" name="Stage 1 item 3"/>
+          <p:cNvSpPr/>
+          <p:nvPr/>
+        </p:nvSpPr>
+        <p:spPr>
+          <a:xfrm>
+            <a:off x="2322576" y="2450592"/>
+            <a:ext cx="1243584" cy="246888"/>
+          </a:xfrm>
+          <a:prstGeom prst="rect">
+            <a:avLst/>
+          </a:prstGeom>
+          <a:noFill/>
+          <a:ln>
+            <a:noFill/>
+          </a:ln>
+          <a:effectLst/>
+        </p:spPr>
+        <p:style>
+          <a:lnRef idx="1">
+            <a:schemeClr val="accent1"/>
+          </a:lnRef>
+          <a:fillRef idx="3">
+            <a:schemeClr val="accent1"/>
+          </a:fillRef>
+          <a:effectRef idx="2">
+            <a:schemeClr val="accent1"/>
+          </a:effectRef>
+          <a:fontRef idx="minor">
+            <a:schemeClr val="lt1"/>
+          </a:fontRef>
+        </p:style>
+        <p:txBody>
+          <a:bodyPr rtlCol="0" anchor="ctr" wrap="square" lIns="45720" rIns="45720" tIns="18288" bIns="18288"/>
+          <a:lstStyle/>
+          <a:p>
+            <a:pPr algn="l"/>
+            <a:r>
+              <a:rPr sz="800" b="0" i="0">
+                <a:solidFill>
+                  <a:srgbClr val="333333"/>
+                </a:solidFill>
+                <a:latin typeface="Arial"/>
+              </a:rPr>
+              <a:t>Upstream channel select</a:t>
+            </a:r>
+          </a:p>
+        </p:txBody>
+      </p:sp>
+      <p:sp>
+        <p:nvSpPr>
+          <p:cNvPr id="189" name="Stage 1 item 4"/>
+          <p:cNvSpPr/>
+          <p:nvPr/>
+        </p:nvSpPr>
+        <p:spPr>
+          <a:xfrm>
+            <a:off x="2322576" y="2697480"/>
+            <a:ext cx="1243584" cy="246888"/>
+          </a:xfrm>
+          <a:prstGeom prst="rect">
+            <a:avLst/>
+          </a:prstGeom>
+          <a:noFill/>
+          <a:ln>
+            <a:noFill/>
+          </a:ln>
+          <a:effectLst/>
+        </p:spPr>
+        <p:style>
+          <a:lnRef idx="1">
+            <a:schemeClr val="accent1"/>
+          </a:lnRef>
+          <a:fillRef idx="3">
+            <a:schemeClr val="accent1"/>
+          </a:fillRef>
+          <a:effectRef idx="2">
+            <a:schemeClr val="accent1"/>
+          </a:effectRef>
+          <a:fontRef idx="minor">
+            <a:schemeClr val="lt1"/>
+          </a:fontRef>
+        </p:style>
+        <p:txBody>
+          <a:bodyPr rtlCol="0" anchor="ctr" wrap="square" lIns="45720" rIns="45720" tIns="18288" bIns="18288"/>
+          <a:lstStyle/>
+          <a:p>
+            <a:pPr algn="l"/>
+            <a:r>
+              <a:rPr sz="800" b="0" i="0">
+                <a:solidFill>
+                  <a:srgbClr val="333333"/>
+                </a:solidFill>
+                <a:latin typeface="Arial"/>
+              </a:rPr>
+              <a:t>complex64 IQ y[n]</a:t>
+            </a:r>
+          </a:p>
+        </p:txBody>
+      </p:sp>
+      <p:sp>
+        <p:nvSpPr>
+          <p:cNvPr id="190" name="Stage 1 item 5"/>
+          <p:cNvSpPr/>
+          <p:nvPr/>
+        </p:nvSpPr>
+        <p:spPr>
+          <a:xfrm>
+            <a:off x="2322576" y="2944368"/>
+            <a:ext cx="1243584" cy="246888"/>
+          </a:xfrm>
+          <a:prstGeom prst="rect">
+            <a:avLst/>
+          </a:prstGeom>
+          <a:noFill/>
+          <a:ln>
+            <a:noFill/>
+          </a:ln>
+          <a:effectLst/>
+        </p:spPr>
+        <p:style>
+          <a:lnRef idx="1">
+            <a:schemeClr val="accent1"/>
+          </a:lnRef>
+          <a:fillRef idx="3">
+            <a:schemeClr val="accent1"/>
+          </a:fillRef>
+          <a:effectRef idx="2">
+            <a:schemeClr val="accent1"/>
+          </a:effectRef>
+          <a:fontRef idx="minor">
+            <a:schemeClr val="lt1"/>
+          </a:fontRef>
+        </p:style>
+        <p:txBody>
+          <a:bodyPr rtlCol="0" anchor="ctr" wrap="square" lIns="45720" rIns="45720" tIns="18288" bIns="18288"/>
+          <a:lstStyle/>
+          <a:p>
+            <a:pPr algn="l"/>
+            <a:r>
+              <a:rPr sz="800" b="0" i="0">
+                <a:solidFill>
+                  <a:srgbClr val="333333"/>
+                </a:solidFill>
+                <a:latin typeface="Arial"/>
+              </a:rPr>
+              <a:t>Capture-health checks</a:t>
+            </a:r>
+          </a:p>
+        </p:txBody>
+      </p:sp>
+      <p:cxnSp>
+        <p:nvCxnSpPr>
+          <p:cNvPr id="191" name="Connector 190"/>
+          <p:cNvCxnSpPr/>
+          <p:nvPr/>
+        </p:nvCxnSpPr>
+        <p:spPr>
+          <a:xfrm>
+            <a:off x="3803904" y="1783080"/>
+            <a:ext cx="109728" cy="0"/>
+          </a:xfrm>
+          <a:prstGeom prst="line">
+            <a:avLst/>
+          </a:prstGeom>
+          <a:ln w="12700">
+            <a:solidFill>
+              <a:srgbClr val="4A5568"/>
+            </a:solidFill>
+            <a:tailEnd type="triangle" w="med" len="med"/>
+          </a:ln>
+        </p:spPr>
+        <p:style>
+          <a:lnRef idx="2">
+            <a:schemeClr val="accent1"/>
+          </a:lnRef>
+          <a:fillRef idx="0">
+            <a:schemeClr val="accent1"/>
+          </a:fillRef>
+          <a:effectRef idx="1">
+            <a:schemeClr val="accent1"/>
+          </a:effectRef>
+          <a:fontRef idx="minor">
+            <a:schemeClr val="tx1"/>
+          </a:fontRef>
+        </p:style>
+      </p:cxnSp>
+      <p:sp>
+        <p:nvSpPr>
+          <p:cNvPr id="192" name="Stage 2 header"/>
+          <p:cNvSpPr/>
+          <p:nvPr/>
+        </p:nvSpPr>
+        <p:spPr>
+          <a:xfrm>
+            <a:off x="3913631" y="1645920"/>
+            <a:ext cx="1517904" cy="274320"/>
+          </a:xfrm>
+          <a:prstGeom prst="roundRect">
+            <a:avLst>
+              <a:gd name="adj" fmla="val 15000"/>
+            </a:avLst>
+          </a:prstGeom>
+          <a:solidFill>
+            <a:srgbClr val="E4E8EE"/>
+          </a:solidFill>
+          <a:ln w="9525">
+            <a:solidFill>
+              <a:srgbClr val="4A5568"/>
+            </a:solidFill>
+          </a:ln>
+          <a:effectLst/>
+        </p:spPr>
+        <p:style>
+          <a:lnRef idx="1">
+            <a:schemeClr val="accent1"/>
+          </a:lnRef>
+          <a:fillRef idx="3">
+            <a:schemeClr val="accent1"/>
+          </a:fillRef>
+          <a:effectRef idx="2">
+            <a:schemeClr val="accent1"/>
+          </a:effectRef>
+          <a:fontRef idx="minor">
+            <a:schemeClr val="lt1"/>
+          </a:fontRef>
+        </p:style>
+        <p:txBody>
+          <a:bodyPr rtlCol="0" anchor="ctr" wrap="square" lIns="45720" rIns="45720" tIns="18288" bIns="18288"/>
+          <a:lstStyle/>
+          <a:p>
+            <a:pPr algn="ctr"/>
+            <a:r>
+              <a:rPr sz="850" b="1" i="0">
+                <a:solidFill>
+                  <a:srgbClr val="333333"/>
+                </a:solidFill>
+                <a:latin typeface="Arial"/>
+              </a:rPr>
+              <a:t>2  DETECT &amp; SEGMENT</a:t>
+            </a:r>
+          </a:p>
+        </p:txBody>
+      </p:sp>
+      <p:sp>
+        <p:nvSpPr>
+          <p:cNvPr id="193" name="Stage 2 body"/>
+          <p:cNvSpPr/>
+          <p:nvPr/>
+        </p:nvSpPr>
+        <p:spPr>
+          <a:xfrm>
+            <a:off x="3913631" y="1920240"/>
+            <a:ext cx="1517904" cy="1536192"/>
+          </a:xfrm>
+          <a:prstGeom prst="roundRect">
+            <a:avLst>
+              <a:gd name="adj" fmla="val 4000"/>
+            </a:avLst>
+          </a:prstGeom>
+          <a:solidFill>
+            <a:srgbClr val="FFFFFF"/>
+          </a:solidFill>
+          <a:ln w="9525">
+            <a:solidFill>
+              <a:srgbClr val="4A5568"/>
+            </a:solidFill>
+          </a:ln>
+          <a:effectLst/>
+        </p:spPr>
+        <p:style>
+          <a:lnRef idx="1">
+            <a:schemeClr val="accent1"/>
+          </a:lnRef>
+          <a:fillRef idx="3">
+            <a:schemeClr val="accent1"/>
+          </a:fillRef>
+          <a:effectRef idx="2">
+            <a:schemeClr val="accent1"/>
+          </a:effectRef>
+          <a:fontRef idx="minor">
+            <a:schemeClr val="lt1"/>
+          </a:fontRef>
+        </p:style>
+        <p:txBody>
+          <a:bodyPr rtlCol="0" anchor="ctr" wrap="square" lIns="45720" rIns="45720" tIns="18288" bIns="18288"/>
+          <a:lstStyle/>
+          <a:p>
+            <a:pPr algn="ctr"/>
+            <a:r>
+              <a:rPr sz="900" b="0" i="0">
+                <a:solidFill>
+                  <a:srgbClr val="333333"/>
+                </a:solidFill>
+                <a:latin typeface="Arial"/>
+              </a:rPr>
+              <a:t/>
+            </a:r>
+          </a:p>
+        </p:txBody>
+      </p:sp>
+      <p:sp>
+        <p:nvSpPr>
+          <p:cNvPr id="194" name="Stage 2 item 1"/>
+          <p:cNvSpPr/>
+          <p:nvPr/>
+        </p:nvSpPr>
+        <p:spPr>
+          <a:xfrm>
+            <a:off x="3950207" y="1956816"/>
+            <a:ext cx="1243584" cy="246888"/>
+          </a:xfrm>
+          <a:prstGeom prst="rect">
+            <a:avLst/>
+          </a:prstGeom>
+          <a:noFill/>
+          <a:ln>
+            <a:noFill/>
+          </a:ln>
+          <a:effectLst/>
+        </p:spPr>
+        <p:style>
+          <a:lnRef idx="1">
+            <a:schemeClr val="accent1"/>
+          </a:lnRef>
+          <a:fillRef idx="3">
+            <a:schemeClr val="accent1"/>
+          </a:fillRef>
+          <a:effectRef idx="2">
+            <a:schemeClr val="accent1"/>
+          </a:effectRef>
+          <a:fontRef idx="minor">
+            <a:schemeClr val="lt1"/>
+          </a:fontRef>
+        </p:style>
+        <p:txBody>
+          <a:bodyPr rtlCol="0" anchor="ctr" wrap="square" lIns="45720" rIns="45720" tIns="18288" bIns="18288"/>
+          <a:lstStyle/>
+          <a:p>
+            <a:pPr algn="l"/>
+            <a:r>
+              <a:rPr sz="800" b="0" i="0">
+                <a:solidFill>
+                  <a:srgbClr val="333333"/>
+                </a:solidFill>
+                <a:latin typeface="Arial"/>
+              </a:rPr>
+              <a:t>Smoothed energy |y[n]|²</a:t>
+            </a:r>
+          </a:p>
+        </p:txBody>
+      </p:sp>
+      <p:sp>
+        <p:nvSpPr>
+          <p:cNvPr id="195" name="Stage 2 item 2"/>
+          <p:cNvSpPr/>
+          <p:nvPr/>
+        </p:nvSpPr>
+        <p:spPr>
+          <a:xfrm>
+            <a:off x="3950207" y="2203704"/>
+            <a:ext cx="1243584" cy="246888"/>
+          </a:xfrm>
+          <a:prstGeom prst="rect">
+            <a:avLst/>
+          </a:prstGeom>
+          <a:noFill/>
+          <a:ln>
+            <a:noFill/>
+          </a:ln>
+          <a:effectLst/>
+        </p:spPr>
+        <p:style>
+          <a:lnRef idx="1">
+            <a:schemeClr val="accent1"/>
+          </a:lnRef>
+          <a:fillRef idx="3">
+            <a:schemeClr val="accent1"/>
+          </a:fillRef>
+          <a:effectRef idx="2">
+            <a:schemeClr val="accent1"/>
+          </a:effectRef>
+          <a:fontRef idx="minor">
+            <a:schemeClr val="lt1"/>
+          </a:fontRef>
+        </p:style>
+        <p:txBody>
+          <a:bodyPr rtlCol="0" anchor="ctr" wrap="square" lIns="45720" rIns="45720" tIns="18288" bIns="18288"/>
+          <a:lstStyle/>
+          <a:p>
+            <a:pPr algn="l"/>
+            <a:r>
+              <a:rPr sz="800" b="0" i="0">
+                <a:solidFill>
+                  <a:srgbClr val="333333"/>
+                </a:solidFill>
+                <a:latin typeface="Arial"/>
+              </a:rPr>
+              <a:t>Noise floor N</a:t>
+            </a:r>
+          </a:p>
+        </p:txBody>
+      </p:sp>
+      <p:sp>
+        <p:nvSpPr>
+          <p:cNvPr id="196" name="Stage 2 item 3"/>
+          <p:cNvSpPr/>
+          <p:nvPr/>
+        </p:nvSpPr>
+        <p:spPr>
+          <a:xfrm>
+            <a:off x="3950207" y="2450592"/>
+            <a:ext cx="1243584" cy="246888"/>
+          </a:xfrm>
+          <a:prstGeom prst="rect">
+            <a:avLst/>
+          </a:prstGeom>
+          <a:noFill/>
+          <a:ln>
+            <a:noFill/>
+          </a:ln>
+          <a:effectLst/>
+        </p:spPr>
+        <p:style>
+          <a:lnRef idx="1">
+            <a:schemeClr val="accent1"/>
+          </a:lnRef>
+          <a:fillRef idx="3">
+            <a:schemeClr val="accent1"/>
+          </a:fillRef>
+          <a:effectRef idx="2">
+            <a:schemeClr val="accent1"/>
+          </a:effectRef>
+          <a:fontRef idx="minor">
+            <a:schemeClr val="lt1"/>
+          </a:fontRef>
+        </p:style>
+        <p:txBody>
+          <a:bodyPr rtlCol="0" anchor="ctr" wrap="square" lIns="45720" rIns="45720" tIns="18288" bIns="18288"/>
+          <a:lstStyle/>
+          <a:p>
+            <a:pPr algn="l"/>
+            <a:r>
+              <a:rPr sz="800" b="0" i="0">
+                <a:solidFill>
+                  <a:srgbClr val="333333"/>
+                </a:solidFill>
+                <a:latin typeface="Arial"/>
+              </a:rPr>
+              <a:t>Threshold γ = αN</a:t>
+            </a:r>
+          </a:p>
+        </p:txBody>
+      </p:sp>
+      <p:sp>
+        <p:nvSpPr>
+          <p:cNvPr id="197" name="Stage 2 item 4"/>
+          <p:cNvSpPr/>
+          <p:nvPr/>
+        </p:nvSpPr>
+        <p:spPr>
+          <a:xfrm>
+            <a:off x="3950207" y="2697480"/>
+            <a:ext cx="1243584" cy="246888"/>
+          </a:xfrm>
+          <a:prstGeom prst="rect">
+            <a:avLst/>
+          </a:prstGeom>
+          <a:noFill/>
+          <a:ln>
+            <a:noFill/>
+          </a:ln>
+          <a:effectLst/>
+        </p:spPr>
+        <p:style>
+          <a:lnRef idx="1">
+            <a:schemeClr val="accent1"/>
+          </a:lnRef>
+          <a:fillRef idx="3">
+            <a:schemeClr val="accent1"/>
+          </a:fillRef>
+          <a:effectRef idx="2">
+            <a:schemeClr val="accent1"/>
+          </a:effectRef>
+          <a:fontRef idx="minor">
+            <a:schemeClr val="lt1"/>
+          </a:fontRef>
+        </p:style>
+        <p:txBody>
+          <a:bodyPr rtlCol="0" anchor="ctr" wrap="square" lIns="45720" rIns="45720" tIns="18288" bIns="18288"/>
+          <a:lstStyle/>
+          <a:p>
+            <a:pPr algn="l"/>
+            <a:r>
+              <a:rPr sz="800" b="0" i="0">
+                <a:solidFill>
+                  <a:srgbClr val="333333"/>
+                </a:solidFill>
+                <a:latin typeface="Arial"/>
+              </a:rPr>
+              <a:t>Active-region extraction</a:t>
+            </a:r>
+          </a:p>
+        </p:txBody>
+      </p:sp>
+      <p:sp>
+        <p:nvSpPr>
+          <p:cNvPr id="198" name="Stage 2 item 5"/>
+          <p:cNvSpPr/>
+          <p:nvPr/>
+        </p:nvSpPr>
+        <p:spPr>
+          <a:xfrm>
+            <a:off x="3950207" y="2944368"/>
+            <a:ext cx="1243584" cy="246888"/>
+          </a:xfrm>
+          <a:prstGeom prst="rect">
+            <a:avLst/>
+          </a:prstGeom>
+          <a:noFill/>
+          <a:ln>
+            <a:noFill/>
+          </a:ln>
+          <a:effectLst/>
+        </p:spPr>
+        <p:style>
+          <a:lnRef idx="1">
+            <a:schemeClr val="accent1"/>
+          </a:lnRef>
+          <a:fillRef idx="3">
+            <a:schemeClr val="accent1"/>
+          </a:fillRef>
+          <a:effectRef idx="2">
+            <a:schemeClr val="accent1"/>
+          </a:effectRef>
+          <a:fontRef idx="minor">
+            <a:schemeClr val="lt1"/>
+          </a:fontRef>
+        </p:style>
+        <p:txBody>
+          <a:bodyPr rtlCol="0" anchor="ctr" wrap="square" lIns="45720" rIns="45720" tIns="18288" bIns="18288"/>
+          <a:lstStyle/>
+          <a:p>
+            <a:pPr algn="l"/>
+            <a:r>
+              <a:rPr sz="800" b="0" i="0">
+                <a:solidFill>
+                  <a:srgbClr val="333333"/>
+                </a:solidFill>
+                <a:latin typeface="Arial"/>
+              </a:rPr>
+              <a:t>Min length / merge gap</a:t>
+            </a:r>
+          </a:p>
+        </p:txBody>
+      </p:sp>
+      <p:sp>
+        <p:nvSpPr>
+          <p:cNvPr id="199" name="Stage 2 item 6"/>
+          <p:cNvSpPr/>
+          <p:nvPr/>
+        </p:nvSpPr>
+        <p:spPr>
+          <a:xfrm>
+            <a:off x="3950207" y="3191256"/>
+            <a:ext cx="1243584" cy="246888"/>
+          </a:xfrm>
+          <a:prstGeom prst="rect">
+            <a:avLst/>
+          </a:prstGeom>
+          <a:noFill/>
+          <a:ln>
+            <a:noFill/>
+          </a:ln>
+          <a:effectLst/>
+        </p:spPr>
+        <p:style>
+          <a:lnRef idx="1">
+            <a:schemeClr val="accent1"/>
+          </a:lnRef>
+          <a:fillRef idx="3">
+            <a:schemeClr val="accent1"/>
+          </a:fillRef>
+          <a:effectRef idx="2">
+            <a:schemeClr val="accent1"/>
+          </a:effectRef>
+          <a:fontRef idx="minor">
+            <a:schemeClr val="lt1"/>
+          </a:fontRef>
+        </p:style>
+        <p:txBody>
+          <a:bodyPr rtlCol="0" anchor="ctr" wrap="square" lIns="45720" rIns="45720" tIns="18288" bIns="18288"/>
+          <a:lstStyle/>
+          <a:p>
+            <a:pPr algn="l"/>
+            <a:r>
+              <a:rPr sz="800" b="0" i="0">
+                <a:solidFill>
+                  <a:srgbClr val="333333"/>
+                </a:solidFill>
+                <a:latin typeface="Arial"/>
+              </a:rPr>
+              <a:t>Window selection</a:t>
+            </a:r>
+          </a:p>
+        </p:txBody>
+      </p:sp>
+      <p:cxnSp>
+        <p:nvCxnSpPr>
+          <p:cNvPr id="200" name="Connector 199"/>
+          <p:cNvCxnSpPr/>
+          <p:nvPr/>
+        </p:nvCxnSpPr>
+        <p:spPr>
+          <a:xfrm>
+            <a:off x="5431536" y="1783080"/>
+            <a:ext cx="109728" cy="0"/>
+          </a:xfrm>
+          <a:prstGeom prst="line">
+            <a:avLst/>
+          </a:prstGeom>
+          <a:ln w="12700">
+            <a:solidFill>
+              <a:srgbClr val="4A5568"/>
+            </a:solidFill>
+            <a:tailEnd type="triangle" w="med" len="med"/>
+          </a:ln>
+        </p:spPr>
+        <p:style>
+          <a:lnRef idx="2">
+            <a:schemeClr val="accent1"/>
+          </a:lnRef>
+          <a:fillRef idx="0">
+            <a:schemeClr val="accent1"/>
+          </a:fillRef>
+          <a:effectRef idx="1">
+            <a:schemeClr val="accent1"/>
+          </a:effectRef>
+          <a:fontRef idx="minor">
+            <a:schemeClr val="tx1"/>
+          </a:fontRef>
+        </p:style>
+      </p:cxnSp>
+      <p:sp>
+        <p:nvSpPr>
+          <p:cNvPr id="201" name="Stage 3 header"/>
+          <p:cNvSpPr/>
+          <p:nvPr/>
+        </p:nvSpPr>
+        <p:spPr>
+          <a:xfrm>
+            <a:off x="5541264" y="1645920"/>
+            <a:ext cx="1517904" cy="274320"/>
+          </a:xfrm>
+          <a:prstGeom prst="roundRect">
+            <a:avLst>
+              <a:gd name="adj" fmla="val 15000"/>
+            </a:avLst>
+          </a:prstGeom>
+          <a:solidFill>
+            <a:srgbClr val="E4E8EE"/>
+          </a:solidFill>
+          <a:ln w="9525">
+            <a:solidFill>
+              <a:srgbClr val="4A5568"/>
+            </a:solidFill>
+          </a:ln>
+          <a:effectLst/>
+        </p:spPr>
+        <p:style>
+          <a:lnRef idx="1">
+            <a:schemeClr val="accent1"/>
+          </a:lnRef>
+          <a:fillRef idx="3">
+            <a:schemeClr val="accent1"/>
+          </a:fillRef>
+          <a:effectRef idx="2">
+            <a:schemeClr val="accent1"/>
+          </a:effectRef>
+          <a:fontRef idx="minor">
+            <a:schemeClr val="lt1"/>
+          </a:fontRef>
+        </p:style>
+        <p:txBody>
+          <a:bodyPr rtlCol="0" anchor="ctr" wrap="square" lIns="45720" rIns="45720" tIns="18288" bIns="18288"/>
+          <a:lstStyle/>
+          <a:p>
+            <a:pPr algn="ctr"/>
+            <a:r>
+              <a:rPr sz="850" b="1" i="0">
+                <a:solidFill>
+                  <a:srgbClr val="333333"/>
+                </a:solidFill>
+                <a:latin typeface="Arial"/>
+              </a:rPr>
+              <a:t>3  INFER &amp; DECIDE</a:t>
+            </a:r>
+          </a:p>
+        </p:txBody>
+      </p:sp>
+      <p:sp>
+        <p:nvSpPr>
+          <p:cNvPr id="202" name="Stage 3 body"/>
+          <p:cNvSpPr/>
+          <p:nvPr/>
+        </p:nvSpPr>
+        <p:spPr>
+          <a:xfrm>
+            <a:off x="5541264" y="1920240"/>
+            <a:ext cx="1517904" cy="1536192"/>
+          </a:xfrm>
+          <a:prstGeom prst="roundRect">
+            <a:avLst>
+              <a:gd name="adj" fmla="val 4000"/>
+            </a:avLst>
+          </a:prstGeom>
+          <a:solidFill>
+            <a:srgbClr val="FFFFFF"/>
+          </a:solidFill>
+          <a:ln w="9525">
+            <a:solidFill>
+              <a:srgbClr val="4A5568"/>
+            </a:solidFill>
+          </a:ln>
+          <a:effectLst/>
+        </p:spPr>
+        <p:style>
+          <a:lnRef idx="1">
+            <a:schemeClr val="accent1"/>
+          </a:lnRef>
+          <a:fillRef idx="3">
+            <a:schemeClr val="accent1"/>
+          </a:fillRef>
+          <a:effectRef idx="2">
+            <a:schemeClr val="accent1"/>
+          </a:effectRef>
+          <a:fontRef idx="minor">
+            <a:schemeClr val="lt1"/>
+          </a:fontRef>
+        </p:style>
+        <p:txBody>
+          <a:bodyPr rtlCol="0" anchor="ctr" wrap="square" lIns="45720" rIns="45720" tIns="18288" bIns="18288"/>
+          <a:lstStyle/>
+          <a:p>
+            <a:pPr algn="ctr"/>
+            <a:r>
+              <a:rPr sz="900" b="0" i="0">
+                <a:solidFill>
+                  <a:srgbClr val="333333"/>
+                </a:solidFill>
+                <a:latin typeface="Arial"/>
+              </a:rPr>
+              <a:t/>
+            </a:r>
+          </a:p>
+        </p:txBody>
+      </p:sp>
+      <p:sp>
+        <p:nvSpPr>
+          <p:cNvPr id="203" name="Stage 3 item 1"/>
+          <p:cNvSpPr/>
+          <p:nvPr/>
+        </p:nvSpPr>
+        <p:spPr>
+          <a:xfrm>
+            <a:off x="5577840" y="1956816"/>
+            <a:ext cx="1243584" cy="246888"/>
+          </a:xfrm>
+          <a:prstGeom prst="rect">
+            <a:avLst/>
+          </a:prstGeom>
+          <a:noFill/>
+          <a:ln>
+            <a:noFill/>
+          </a:ln>
+          <a:effectLst/>
+        </p:spPr>
+        <p:style>
+          <a:lnRef idx="1">
+            <a:schemeClr val="accent1"/>
+          </a:lnRef>
+          <a:fillRef idx="3">
+            <a:schemeClr val="accent1"/>
+          </a:fillRef>
+          <a:effectRef idx="2">
+            <a:schemeClr val="accent1"/>
+          </a:effectRef>
+          <a:fontRef idx="minor">
+            <a:schemeClr val="lt1"/>
+          </a:fontRef>
+        </p:style>
+        <p:txBody>
+          <a:bodyPr rtlCol="0" anchor="ctr" wrap="square" lIns="45720" rIns="45720" tIns="18288" bIns="18288"/>
+          <a:lstStyle/>
+          <a:p>
+            <a:pPr algn="l"/>
+            <a:r>
+              <a:rPr sz="800" b="0" i="0">
+                <a:solidFill>
+                  <a:srgbClr val="333333"/>
+                </a:solidFill>
+                <a:latin typeface="Arial"/>
+              </a:rPr>
+              <a:t>AWN preprocessing</a:t>
+            </a:r>
+          </a:p>
+        </p:txBody>
+      </p:sp>
+      <p:sp>
+        <p:nvSpPr>
+          <p:cNvPr id="204" name="Stage 3 item 2"/>
+          <p:cNvSpPr/>
+          <p:nvPr/>
+        </p:nvSpPr>
+        <p:spPr>
+          <a:xfrm>
+            <a:off x="5577840" y="2203704"/>
+            <a:ext cx="1243584" cy="246888"/>
+          </a:xfrm>
+          <a:prstGeom prst="rect">
+            <a:avLst/>
+          </a:prstGeom>
+          <a:noFill/>
+          <a:ln>
+            <a:noFill/>
+          </a:ln>
+          <a:effectLst/>
+        </p:spPr>
+        <p:style>
+          <a:lnRef idx="1">
+            <a:schemeClr val="accent1"/>
+          </a:lnRef>
+          <a:fillRef idx="3">
+            <a:schemeClr val="accent1"/>
+          </a:fillRef>
+          <a:effectRef idx="2">
+            <a:schemeClr val="accent1"/>
+          </a:effectRef>
+          <a:fontRef idx="minor">
+            <a:schemeClr val="lt1"/>
+          </a:fontRef>
+        </p:style>
+        <p:txBody>
+          <a:bodyPr rtlCol="0" anchor="ctr" wrap="square" lIns="45720" rIns="45720" tIns="18288" bIns="18288"/>
+          <a:lstStyle/>
+          <a:p>
+            <a:pPr algn="l"/>
+            <a:r>
+              <a:rPr sz="800" b="0" i="0">
+                <a:solidFill>
+                  <a:srgbClr val="333333"/>
+                </a:solidFill>
+                <a:latin typeface="Arial"/>
+              </a:rPr>
+              <a:t>AMC classifier</a:t>
+            </a:r>
+          </a:p>
+        </p:txBody>
+      </p:sp>
+      <p:sp>
+        <p:nvSpPr>
+          <p:cNvPr id="205" name="Stage 3 item 3"/>
+          <p:cNvSpPr/>
+          <p:nvPr/>
+        </p:nvSpPr>
+        <p:spPr>
+          <a:xfrm>
+            <a:off x="5577840" y="2450592"/>
+            <a:ext cx="1243584" cy="246888"/>
+          </a:xfrm>
+          <a:prstGeom prst="rect">
+            <a:avLst/>
+          </a:prstGeom>
+          <a:noFill/>
+          <a:ln>
+            <a:noFill/>
+          </a:ln>
+          <a:effectLst/>
+        </p:spPr>
+        <p:style>
+          <a:lnRef idx="1">
+            <a:schemeClr val="accent1"/>
+          </a:lnRef>
+          <a:fillRef idx="3">
+            <a:schemeClr val="accent1"/>
+          </a:fillRef>
+          <a:effectRef idx="2">
+            <a:schemeClr val="accent1"/>
+          </a:effectRef>
+          <a:fontRef idx="minor">
+            <a:schemeClr val="lt1"/>
+          </a:fontRef>
+        </p:style>
+        <p:txBody>
+          <a:bodyPr rtlCol="0" anchor="ctr" wrap="square" lIns="45720" rIns="45720" tIns="18288" bIns="18288"/>
+          <a:lstStyle/>
+          <a:p>
+            <a:pPr algn="l"/>
+            <a:r>
+              <a:rPr sz="800" b="0" i="0">
+                <a:solidFill>
+                  <a:srgbClr val="333333"/>
+                </a:solidFill>
+                <a:latin typeface="Arial"/>
+              </a:rPr>
+              <a:t>Top-K / Adaptive-K</a:t>
+            </a:r>
+          </a:p>
+        </p:txBody>
+      </p:sp>
+      <p:sp>
+        <p:nvSpPr>
+          <p:cNvPr id="206" name="Stage 3 item 4"/>
+          <p:cNvSpPr/>
+          <p:nvPr/>
+        </p:nvSpPr>
+        <p:spPr>
+          <a:xfrm>
+            <a:off x="5577840" y="2697480"/>
+            <a:ext cx="1243584" cy="246888"/>
+          </a:xfrm>
+          <a:prstGeom prst="rect">
+            <a:avLst/>
+          </a:prstGeom>
+          <a:noFill/>
+          <a:ln>
+            <a:noFill/>
+          </a:ln>
+          <a:effectLst/>
+        </p:spPr>
+        <p:style>
+          <a:lnRef idx="1">
+            <a:schemeClr val="accent1"/>
+          </a:lnRef>
+          <a:fillRef idx="3">
+            <a:schemeClr val="accent1"/>
+          </a:fillRef>
+          <a:effectRef idx="2">
+            <a:schemeClr val="accent1"/>
+          </a:effectRef>
+          <a:fontRef idx="minor">
+            <a:schemeClr val="lt1"/>
+          </a:fontRef>
+        </p:style>
+        <p:txBody>
+          <a:bodyPr rtlCol="0" anchor="ctr" wrap="square" lIns="45720" rIns="45720" tIns="18288" bIns="18288"/>
+          <a:lstStyle/>
+          <a:p>
+            <a:pPr algn="l"/>
+            <a:r>
+              <a:rPr sz="800" b="0" i="0">
+                <a:solidFill>
+                  <a:srgbClr val="333333"/>
+                </a:solidFill>
+                <a:latin typeface="Arial"/>
+              </a:rPr>
+              <a:t>Event-level aggregation</a:t>
+            </a:r>
+          </a:p>
+        </p:txBody>
+      </p:sp>
+      <p:sp>
+        <p:nvSpPr>
+          <p:cNvPr id="207" name="Stage 3 item 5"/>
+          <p:cNvSpPr/>
+          <p:nvPr/>
+        </p:nvSpPr>
+        <p:spPr>
+          <a:xfrm>
+            <a:off x="5577840" y="2944368"/>
+            <a:ext cx="1243584" cy="246888"/>
+          </a:xfrm>
+          <a:prstGeom prst="rect">
+            <a:avLst/>
+          </a:prstGeom>
+          <a:noFill/>
+          <a:ln>
+            <a:noFill/>
+          </a:ln>
+          <a:effectLst/>
+        </p:spPr>
+        <p:style>
+          <a:lnRef idx="1">
+            <a:schemeClr val="accent1"/>
+          </a:lnRef>
+          <a:fillRef idx="3">
+            <a:schemeClr val="accent1"/>
+          </a:fillRef>
+          <a:effectRef idx="2">
+            <a:schemeClr val="accent1"/>
+          </a:effectRef>
+          <a:fontRef idx="minor">
+            <a:schemeClr val="lt1"/>
+          </a:fontRef>
+        </p:style>
+        <p:txBody>
+          <a:bodyPr rtlCol="0" anchor="ctr" wrap="square" lIns="45720" rIns="45720" tIns="18288" bIns="18288"/>
+          <a:lstStyle/>
+          <a:p>
+            <a:pPr algn="l"/>
+            <a:r>
+              <a:rPr sz="800" b="0" i="0">
+                <a:solidFill>
+                  <a:srgbClr val="333333"/>
+                </a:solidFill>
+                <a:latin typeface="Arial"/>
+              </a:rPr>
+              <a:t>Confidence / abstention</a:t>
+            </a:r>
+          </a:p>
+        </p:txBody>
+      </p:sp>
+      <p:sp>
+        <p:nvSpPr>
+          <p:cNvPr id="208" name="Stage 3 item 6"/>
+          <p:cNvSpPr/>
+          <p:nvPr/>
+        </p:nvSpPr>
+        <p:spPr>
+          <a:xfrm>
+            <a:off x="5577840" y="3191256"/>
+            <a:ext cx="1243584" cy="246888"/>
+          </a:xfrm>
+          <a:prstGeom prst="rect">
+            <a:avLst/>
+          </a:prstGeom>
+          <a:noFill/>
+          <a:ln>
+            <a:noFill/>
+          </a:ln>
+          <a:effectLst/>
+        </p:spPr>
+        <p:style>
+          <a:lnRef idx="1">
+            <a:schemeClr val="accent1"/>
+          </a:lnRef>
+          <a:fillRef idx="3">
+            <a:schemeClr val="accent1"/>
+          </a:fillRef>
+          <a:effectRef idx="2">
+            <a:schemeClr val="accent1"/>
+          </a:effectRef>
+          <a:fontRef idx="minor">
+            <a:schemeClr val="lt1"/>
+          </a:fontRef>
+        </p:style>
+        <p:txBody>
+          <a:bodyPr rtlCol="0" anchor="ctr" wrap="square" lIns="45720" rIns="45720" tIns="18288" bIns="18288"/>
+          <a:lstStyle/>
+          <a:p>
+            <a:pPr algn="l"/>
+            <a:r>
+              <a:rPr sz="800" b="0" i="0">
+                <a:solidFill>
+                  <a:srgbClr val="333333"/>
+                </a:solidFill>
+                <a:latin typeface="Arial"/>
+              </a:rPr>
+              <a:t>Failure reporting</a:t>
+            </a:r>
+          </a:p>
+        </p:txBody>
+      </p:sp>
+      <p:cxnSp>
+        <p:nvCxnSpPr>
+          <p:cNvPr id="209" name="Connector 208"/>
+          <p:cNvCxnSpPr/>
+          <p:nvPr/>
+        </p:nvCxnSpPr>
+        <p:spPr>
+          <a:xfrm>
+            <a:off x="7059168" y="1783080"/>
+            <a:ext cx="109728" cy="0"/>
+          </a:xfrm>
+          <a:prstGeom prst="line">
+            <a:avLst/>
+          </a:prstGeom>
+          <a:ln w="12700">
+            <a:solidFill>
+              <a:srgbClr val="4A5568"/>
+            </a:solidFill>
+            <a:tailEnd type="triangle" w="med" len="med"/>
+          </a:ln>
+        </p:spPr>
+        <p:style>
+          <a:lnRef idx="2">
+            <a:schemeClr val="accent1"/>
+          </a:lnRef>
+          <a:fillRef idx="0">
+            <a:schemeClr val="accent1"/>
+          </a:fillRef>
+          <a:effectRef idx="1">
+            <a:schemeClr val="accent1"/>
+          </a:effectRef>
+          <a:fontRef idx="minor">
+            <a:schemeClr val="tx1"/>
+          </a:fontRef>
+        </p:style>
+      </p:cxnSp>
+      <p:sp>
+        <p:nvSpPr>
+          <p:cNvPr id="210" name="Stage 4 header"/>
+          <p:cNvSpPr/>
+          <p:nvPr/>
+        </p:nvSpPr>
+        <p:spPr>
+          <a:xfrm>
+            <a:off x="7168896" y="1645920"/>
+            <a:ext cx="1517904" cy="274320"/>
+          </a:xfrm>
+          <a:prstGeom prst="roundRect">
+            <a:avLst>
+              <a:gd name="adj" fmla="val 15000"/>
+            </a:avLst>
+          </a:prstGeom>
+          <a:solidFill>
+            <a:srgbClr val="E4E8EE"/>
+          </a:solidFill>
+          <a:ln w="9525">
+            <a:solidFill>
+              <a:srgbClr val="4A5568"/>
+            </a:solidFill>
+          </a:ln>
+          <a:effectLst/>
+        </p:spPr>
+        <p:style>
+          <a:lnRef idx="1">
+            <a:schemeClr val="accent1"/>
+          </a:lnRef>
+          <a:fillRef idx="3">
+            <a:schemeClr val="accent1"/>
+          </a:fillRef>
+          <a:effectRef idx="2">
+            <a:schemeClr val="accent1"/>
+          </a:effectRef>
+          <a:fontRef idx="minor">
+            <a:schemeClr val="lt1"/>
+          </a:fontRef>
+        </p:style>
+        <p:txBody>
+          <a:bodyPr rtlCol="0" anchor="ctr" wrap="square" lIns="45720" rIns="45720" tIns="18288" bIns="18288"/>
+          <a:lstStyle/>
+          <a:p>
+            <a:pPr algn="ctr"/>
+            <a:r>
+              <a:rPr sz="850" b="1" i="0">
+                <a:solidFill>
+                  <a:srgbClr val="333333"/>
+                </a:solidFill>
+                <a:latin typeface="Arial"/>
+              </a:rPr>
+              <a:t>4  RECORD &amp; TRIAGE</a:t>
+            </a:r>
+          </a:p>
+        </p:txBody>
+      </p:sp>
+      <p:sp>
+        <p:nvSpPr>
+          <p:cNvPr id="211" name="Stage 4 body"/>
+          <p:cNvSpPr/>
+          <p:nvPr/>
+        </p:nvSpPr>
+        <p:spPr>
+          <a:xfrm>
+            <a:off x="7168896" y="1920240"/>
+            <a:ext cx="1517904" cy="1536192"/>
+          </a:xfrm>
+          <a:prstGeom prst="roundRect">
+            <a:avLst>
+              <a:gd name="adj" fmla="val 4000"/>
+            </a:avLst>
+          </a:prstGeom>
+          <a:solidFill>
+            <a:srgbClr val="FFFFFF"/>
+          </a:solidFill>
+          <a:ln w="9525">
+            <a:solidFill>
+              <a:srgbClr val="4A5568"/>
+            </a:solidFill>
+          </a:ln>
+          <a:effectLst/>
+        </p:spPr>
+        <p:style>
+          <a:lnRef idx="1">
+            <a:schemeClr val="accent1"/>
+          </a:lnRef>
+          <a:fillRef idx="3">
+            <a:schemeClr val="accent1"/>
+          </a:fillRef>
+          <a:effectRef idx="2">
+            <a:schemeClr val="accent1"/>
+          </a:effectRef>
+          <a:fontRef idx="minor">
+            <a:schemeClr val="lt1"/>
+          </a:fontRef>
+        </p:style>
+        <p:txBody>
+          <a:bodyPr rtlCol="0" anchor="ctr" wrap="square" lIns="45720" rIns="45720" tIns="18288" bIns="18288"/>
+          <a:lstStyle/>
+          <a:p>
+            <a:pPr algn="ctr"/>
+            <a:r>
+              <a:rPr sz="900" b="0" i="0">
+                <a:solidFill>
+                  <a:srgbClr val="333333"/>
+                </a:solidFill>
+                <a:latin typeface="Arial"/>
+              </a:rPr>
+              <a:t/>
+            </a:r>
+          </a:p>
+        </p:txBody>
+      </p:sp>
+      <p:sp>
+        <p:nvSpPr>
+          <p:cNvPr id="212" name="Stage 4 item 1"/>
+          <p:cNvSpPr/>
+          <p:nvPr/>
+        </p:nvSpPr>
+        <p:spPr>
+          <a:xfrm>
+            <a:off x="7205472" y="1956816"/>
+            <a:ext cx="1243584" cy="246888"/>
+          </a:xfrm>
+          <a:prstGeom prst="rect">
+            <a:avLst/>
+          </a:prstGeom>
+          <a:noFill/>
+          <a:ln>
+            <a:noFill/>
+          </a:ln>
+          <a:effectLst/>
+        </p:spPr>
+        <p:style>
+          <a:lnRef idx="1">
+            <a:schemeClr val="accent1"/>
+          </a:lnRef>
+          <a:fillRef idx="3">
+            <a:schemeClr val="accent1"/>
+          </a:fillRef>
+          <a:effectRef idx="2">
+            <a:schemeClr val="accent1"/>
+          </a:effectRef>
+          <a:fontRef idx="minor">
+            <a:schemeClr val="lt1"/>
+          </a:fontRef>
+        </p:style>
+        <p:txBody>
+          <a:bodyPr rtlCol="0" anchor="ctr" wrap="square" lIns="45720" rIns="45720" tIns="18288" bIns="18288"/>
+          <a:lstStyle/>
+          <a:p>
+            <a:pPr algn="l"/>
+            <a:r>
+              <a:rPr sz="800" b="0" i="0">
+                <a:solidFill>
+                  <a:srgbClr val="333333"/>
+                </a:solidFill>
+                <a:latin typeface="Arial"/>
+              </a:rPr>
+              <a:t>Event ID / timeline</a:t>
+            </a:r>
+          </a:p>
+        </p:txBody>
+      </p:sp>
+      <p:sp>
+        <p:nvSpPr>
+          <p:cNvPr id="213" name="Stage 4 item 2"/>
+          <p:cNvSpPr/>
+          <p:nvPr/>
+        </p:nvSpPr>
+        <p:spPr>
+          <a:xfrm>
+            <a:off x="7205472" y="2203704"/>
+            <a:ext cx="1243584" cy="246888"/>
+          </a:xfrm>
+          <a:prstGeom prst="rect">
+            <a:avLst/>
+          </a:prstGeom>
+          <a:noFill/>
+          <a:ln>
+            <a:noFill/>
+          </a:ln>
+          <a:effectLst/>
+        </p:spPr>
+        <p:style>
+          <a:lnRef idx="1">
+            <a:schemeClr val="accent1"/>
+          </a:lnRef>
+          <a:fillRef idx="3">
+            <a:schemeClr val="accent1"/>
+          </a:fillRef>
+          <a:effectRef idx="2">
+            <a:schemeClr val="accent1"/>
+          </a:effectRef>
+          <a:fontRef idx="minor">
+            <a:schemeClr val="lt1"/>
+          </a:fontRef>
+        </p:style>
+        <p:txBody>
+          <a:bodyPr rtlCol="0" anchor="ctr" wrap="square" lIns="45720" rIns="45720" tIns="18288" bIns="18288"/>
+          <a:lstStyle/>
+          <a:p>
+            <a:pPr algn="l"/>
+            <a:r>
+              <a:rPr sz="800" b="0" i="0">
+                <a:solidFill>
+                  <a:srgbClr val="333333"/>
+                </a:solidFill>
+                <a:latin typeface="Arial"/>
+              </a:rPr>
+              <a:t>Label + confidence</a:t>
+            </a:r>
+          </a:p>
+        </p:txBody>
+      </p:sp>
+      <p:sp>
+        <p:nvSpPr>
+          <p:cNvPr id="214" name="Stage 4 item 3"/>
+          <p:cNvSpPr/>
+          <p:nvPr/>
+        </p:nvSpPr>
+        <p:spPr>
+          <a:xfrm>
+            <a:off x="7205472" y="2450592"/>
+            <a:ext cx="1243584" cy="246888"/>
+          </a:xfrm>
+          <a:prstGeom prst="rect">
+            <a:avLst/>
+          </a:prstGeom>
+          <a:noFill/>
+          <a:ln>
+            <a:noFill/>
+          </a:ln>
+          <a:effectLst/>
+        </p:spPr>
+        <p:style>
+          <a:lnRef idx="1">
+            <a:schemeClr val="accent1"/>
+          </a:lnRef>
+          <a:fillRef idx="3">
+            <a:schemeClr val="accent1"/>
+          </a:fillRef>
+          <a:effectRef idx="2">
+            <a:schemeClr val="accent1"/>
+          </a:effectRef>
+          <a:fontRef idx="minor">
+            <a:schemeClr val="lt1"/>
+          </a:fontRef>
+        </p:style>
+        <p:txBody>
+          <a:bodyPr rtlCol="0" anchor="ctr" wrap="square" lIns="45720" rIns="45720" tIns="18288" bIns="18288"/>
+          <a:lstStyle/>
+          <a:p>
+            <a:pPr algn="l"/>
+            <a:r>
+              <a:rPr sz="800" b="0" i="0">
+                <a:solidFill>
+                  <a:srgbClr val="333333"/>
+                </a:solidFill>
+                <a:latin typeface="Arial"/>
+              </a:rPr>
+              <a:t>Defense / abstain status</a:t>
+            </a:r>
+          </a:p>
+        </p:txBody>
+      </p:sp>
+      <p:sp>
+        <p:nvSpPr>
+          <p:cNvPr id="215" name="Stage 4 item 4"/>
+          <p:cNvSpPr/>
+          <p:nvPr/>
+        </p:nvSpPr>
+        <p:spPr>
+          <a:xfrm>
+            <a:off x="7205472" y="2697480"/>
+            <a:ext cx="1243584" cy="246888"/>
+          </a:xfrm>
+          <a:prstGeom prst="rect">
+            <a:avLst/>
+          </a:prstGeom>
+          <a:noFill/>
+          <a:ln>
+            <a:noFill/>
+          </a:ln>
+          <a:effectLst/>
+        </p:spPr>
+        <p:style>
+          <a:lnRef idx="1">
+            <a:schemeClr val="accent1"/>
+          </a:lnRef>
+          <a:fillRef idx="3">
+            <a:schemeClr val="accent1"/>
+          </a:fillRef>
+          <a:effectRef idx="2">
+            <a:schemeClr val="accent1"/>
+          </a:effectRef>
+          <a:fontRef idx="minor">
+            <a:schemeClr val="lt1"/>
+          </a:fontRef>
+        </p:style>
+        <p:txBody>
+          <a:bodyPr rtlCol="0" anchor="ctr" wrap="square" lIns="45720" rIns="45720" tIns="18288" bIns="18288"/>
+          <a:lstStyle/>
+          <a:p>
+            <a:pPr algn="l"/>
+            <a:r>
+              <a:rPr sz="800" b="0" i="0">
+                <a:solidFill>
+                  <a:srgbClr val="333333"/>
+                </a:solidFill>
+                <a:latin typeface="Arial"/>
+              </a:rPr>
+              <a:t>Raw IQ + guard samples</a:t>
+            </a:r>
+          </a:p>
+        </p:txBody>
+      </p:sp>
+      <p:sp>
+        <p:nvSpPr>
+          <p:cNvPr id="216" name="Stage 4 item 5"/>
+          <p:cNvSpPr/>
+          <p:nvPr/>
+        </p:nvSpPr>
+        <p:spPr>
+          <a:xfrm>
+            <a:off x="7205472" y="2944368"/>
+            <a:ext cx="1243584" cy="246888"/>
+          </a:xfrm>
+          <a:prstGeom prst="rect">
+            <a:avLst/>
+          </a:prstGeom>
+          <a:noFill/>
+          <a:ln>
+            <a:noFill/>
+          </a:ln>
+          <a:effectLst/>
+        </p:spPr>
+        <p:style>
+          <a:lnRef idx="1">
+            <a:schemeClr val="accent1"/>
+          </a:lnRef>
+          <a:fillRef idx="3">
+            <a:schemeClr val="accent1"/>
+          </a:fillRef>
+          <a:effectRef idx="2">
+            <a:schemeClr val="accent1"/>
+          </a:effectRef>
+          <a:fontRef idx="minor">
+            <a:schemeClr val="lt1"/>
+          </a:fontRef>
+        </p:style>
+        <p:txBody>
+          <a:bodyPr rtlCol="0" anchor="ctr" wrap="square" lIns="45720" rIns="45720" tIns="18288" bIns="18288"/>
+          <a:lstStyle/>
+          <a:p>
+            <a:pPr algn="l"/>
+            <a:r>
+              <a:rPr sz="800" b="0" i="0">
+                <a:solidFill>
+                  <a:srgbClr val="333333"/>
+                </a:solidFill>
+                <a:latin typeface="Arial"/>
+              </a:rPr>
+              <a:t>Capture / model metadata</a:t>
+            </a:r>
+          </a:p>
+        </p:txBody>
+      </p:sp>
+      <p:sp>
+        <p:nvSpPr>
+          <p:cNvPr id="217" name="Stage 4 item 6"/>
+          <p:cNvSpPr/>
+          <p:nvPr/>
+        </p:nvSpPr>
+        <p:spPr>
+          <a:xfrm>
+            <a:off x="7205472" y="3191256"/>
+            <a:ext cx="1243584" cy="246888"/>
+          </a:xfrm>
+          <a:prstGeom prst="rect">
+            <a:avLst/>
+          </a:prstGeom>
+          <a:noFill/>
+          <a:ln>
+            <a:noFill/>
+          </a:ln>
+          <a:effectLst/>
+        </p:spPr>
+        <p:style>
+          <a:lnRef idx="1">
+            <a:schemeClr val="accent1"/>
+          </a:lnRef>
+          <a:fillRef idx="3">
+            <a:schemeClr val="accent1"/>
+          </a:fillRef>
+          <a:effectRef idx="2">
+            <a:schemeClr val="accent1"/>
+          </a:effectRef>
+          <a:fontRef idx="minor">
+            <a:schemeClr val="lt1"/>
+          </a:fontRef>
+        </p:style>
+        <p:txBody>
+          <a:bodyPr rtlCol="0" anchor="ctr" wrap="square" lIns="45720" rIns="45720" tIns="18288" bIns="18288"/>
+          <a:lstStyle/>
+          <a:p>
+            <a:pPr algn="l"/>
+            <a:r>
+              <a:rPr sz="800" b="0" i="0">
+                <a:solidFill>
+                  <a:srgbClr val="333333"/>
+                </a:solidFill>
+                <a:latin typeface="Arial"/>
+              </a:rPr>
+              <a:t>Analyst queue</a:t>
+            </a:r>
+          </a:p>
+        </p:txBody>
+      </p:sp>
+      <p:sp>
+        <p:nvSpPr>
+          <p:cNvPr id="218" name="AP1 badge"/>
+          <p:cNvSpPr/>
+          <p:nvPr/>
+        </p:nvSpPr>
+        <p:spPr>
+          <a:xfrm>
+            <a:off x="2066543" y="1865376"/>
+            <a:ext cx="219456" cy="219456"/>
+          </a:xfrm>
+          <a:prstGeom prst="ellipse">
+            <a:avLst/>
+          </a:prstGeom>
+          <a:solidFill>
+            <a:srgbClr val="FFFFFF"/>
+          </a:solidFill>
+          <a:ln w="15875">
+            <a:solidFill>
+              <a:srgbClr val="C0392B"/>
+            </a:solidFill>
+          </a:ln>
+          <a:effectLst/>
+        </p:spPr>
+        <p:style>
+          <a:lnRef idx="1">
+            <a:schemeClr val="accent1"/>
+          </a:lnRef>
+          <a:fillRef idx="3">
+            <a:schemeClr val="accent1"/>
+          </a:fillRef>
+          <a:effectRef idx="2">
+            <a:schemeClr val="accent1"/>
+          </a:effectRef>
+          <a:fontRef idx="minor">
+            <a:schemeClr val="lt1"/>
+          </a:fontRef>
+        </p:style>
+        <p:txBody>
+          <a:bodyPr rtlCol="0" anchor="ctr" wrap="square" lIns="45720" rIns="45720" tIns="18288" bIns="18288"/>
+          <a:lstStyle/>
+          <a:p>
+            <a:pPr algn="ctr"/>
+            <a:r>
+              <a:rPr sz="900" b="1" i="0">
+                <a:solidFill>
+                  <a:srgbClr val="C0392B"/>
+                </a:solidFill>
+                <a:latin typeface="Arial"/>
+              </a:rPr>
+              <a:t>1</a:t>
+            </a:r>
+          </a:p>
+        </p:txBody>
+      </p:sp>
+      <p:sp>
+        <p:nvSpPr>
+          <p:cNvPr id="219" name="AP2 badge"/>
+          <p:cNvSpPr/>
+          <p:nvPr/>
+        </p:nvSpPr>
+        <p:spPr>
+          <a:xfrm>
+            <a:off x="5184648" y="2217420"/>
+            <a:ext cx="219456" cy="219456"/>
+          </a:xfrm>
+          <a:prstGeom prst="ellipse">
+            <a:avLst/>
+          </a:prstGeom>
+          <a:solidFill>
+            <a:srgbClr val="FFFFFF"/>
+          </a:solidFill>
+          <a:ln w="15875">
+            <a:solidFill>
+              <a:srgbClr val="C0392B"/>
+            </a:solidFill>
+          </a:ln>
+          <a:effectLst/>
+        </p:spPr>
+        <p:style>
+          <a:lnRef idx="1">
+            <a:schemeClr val="accent1"/>
+          </a:lnRef>
+          <a:fillRef idx="3">
+            <a:schemeClr val="accent1"/>
+          </a:fillRef>
+          <a:effectRef idx="2">
+            <a:schemeClr val="accent1"/>
+          </a:effectRef>
+          <a:fontRef idx="minor">
+            <a:schemeClr val="lt1"/>
+          </a:fontRef>
+        </p:style>
+        <p:txBody>
+          <a:bodyPr rtlCol="0" anchor="ctr" wrap="square" lIns="45720" rIns="45720" tIns="18288" bIns="18288"/>
+          <a:lstStyle/>
+          <a:p>
+            <a:pPr algn="ctr"/>
+            <a:r>
+              <a:rPr sz="900" b="1" i="0">
+                <a:solidFill>
+                  <a:srgbClr val="C0392B"/>
+                </a:solidFill>
+                <a:latin typeface="Arial"/>
+              </a:rPr>
+              <a:t>2</a:t>
+            </a:r>
+          </a:p>
+        </p:txBody>
+      </p:sp>
+      <p:sp>
+        <p:nvSpPr>
+          <p:cNvPr id="220" name="AP3 badge"/>
+          <p:cNvSpPr/>
+          <p:nvPr/>
+        </p:nvSpPr>
+        <p:spPr>
+          <a:xfrm>
+            <a:off x="5184648" y="2711196"/>
+            <a:ext cx="219456" cy="219456"/>
+          </a:xfrm>
+          <a:prstGeom prst="ellipse">
+            <a:avLst/>
+          </a:prstGeom>
+          <a:solidFill>
+            <a:srgbClr val="FFFFFF"/>
+          </a:solidFill>
+          <a:ln w="15875">
+            <a:solidFill>
+              <a:srgbClr val="C0392B"/>
+            </a:solidFill>
+          </a:ln>
+          <a:effectLst/>
+        </p:spPr>
+        <p:style>
+          <a:lnRef idx="1">
+            <a:schemeClr val="accent1"/>
+          </a:lnRef>
+          <a:fillRef idx="3">
+            <a:schemeClr val="accent1"/>
+          </a:fillRef>
+          <a:effectRef idx="2">
+            <a:schemeClr val="accent1"/>
+          </a:effectRef>
+          <a:fontRef idx="minor">
+            <a:schemeClr val="lt1"/>
+          </a:fontRef>
+        </p:style>
+        <p:txBody>
+          <a:bodyPr rtlCol="0" anchor="ctr" wrap="square" lIns="45720" rIns="45720" tIns="18288" bIns="18288"/>
+          <a:lstStyle/>
+          <a:p>
+            <a:pPr algn="ctr"/>
+            <a:r>
+              <a:rPr sz="900" b="1" i="0">
+                <a:solidFill>
+                  <a:srgbClr val="C0392B"/>
+                </a:solidFill>
+                <a:latin typeface="Arial"/>
+              </a:rPr>
+              <a:t>3</a:t>
+            </a:r>
+          </a:p>
+        </p:txBody>
+      </p:sp>
+      <p:sp>
+        <p:nvSpPr>
+          <p:cNvPr id="221" name="AP4 badge"/>
+          <p:cNvSpPr/>
+          <p:nvPr/>
+        </p:nvSpPr>
+        <p:spPr>
+          <a:xfrm>
+            <a:off x="5184648" y="3204972"/>
+            <a:ext cx="219456" cy="219456"/>
+          </a:xfrm>
+          <a:prstGeom prst="ellipse">
+            <a:avLst/>
+          </a:prstGeom>
+          <a:solidFill>
+            <a:srgbClr val="FFFFFF"/>
+          </a:solidFill>
+          <a:ln w="15875">
+            <a:solidFill>
+              <a:srgbClr val="C0392B"/>
+            </a:solidFill>
+          </a:ln>
+          <a:effectLst/>
+        </p:spPr>
+        <p:style>
+          <a:lnRef idx="1">
+            <a:schemeClr val="accent1"/>
+          </a:lnRef>
+          <a:fillRef idx="3">
+            <a:schemeClr val="accent1"/>
+          </a:fillRef>
+          <a:effectRef idx="2">
+            <a:schemeClr val="accent1"/>
+          </a:effectRef>
+          <a:fontRef idx="minor">
+            <a:schemeClr val="lt1"/>
+          </a:fontRef>
+        </p:style>
+        <p:txBody>
+          <a:bodyPr rtlCol="0" anchor="ctr" wrap="square" lIns="45720" rIns="45720" tIns="18288" bIns="18288"/>
+          <a:lstStyle/>
+          <a:p>
+            <a:pPr algn="ctr"/>
+            <a:r>
+              <a:rPr sz="900" b="1" i="0">
+                <a:solidFill>
+                  <a:srgbClr val="C0392B"/>
+                </a:solidFill>
+                <a:latin typeface="Arial"/>
+              </a:rPr>
+              <a:t>4</a:t>
+            </a:r>
+          </a:p>
+        </p:txBody>
+      </p:sp>
+      <p:sp>
+        <p:nvSpPr>
+          <p:cNvPr id="222" name="AP5 badge"/>
+          <p:cNvSpPr/>
+          <p:nvPr/>
+        </p:nvSpPr>
+        <p:spPr>
+          <a:xfrm>
+            <a:off x="6812279" y="2217420"/>
+            <a:ext cx="219456" cy="219456"/>
+          </a:xfrm>
+          <a:prstGeom prst="ellipse">
+            <a:avLst/>
+          </a:prstGeom>
+          <a:solidFill>
+            <a:srgbClr val="C0392B"/>
+          </a:solidFill>
+          <a:ln w="15875">
+            <a:solidFill>
+              <a:srgbClr val="C0392B"/>
+            </a:solidFill>
+          </a:ln>
+          <a:effectLst/>
+        </p:spPr>
+        <p:style>
+          <a:lnRef idx="1">
+            <a:schemeClr val="accent1"/>
+          </a:lnRef>
+          <a:fillRef idx="3">
+            <a:schemeClr val="accent1"/>
+          </a:fillRef>
+          <a:effectRef idx="2">
+            <a:schemeClr val="accent1"/>
+          </a:effectRef>
+          <a:fontRef idx="minor">
+            <a:schemeClr val="lt1"/>
+          </a:fontRef>
+        </p:style>
+        <p:txBody>
+          <a:bodyPr rtlCol="0" anchor="ctr" wrap="square" lIns="45720" rIns="45720" tIns="18288" bIns="18288"/>
+          <a:lstStyle/>
+          <a:p>
+            <a:pPr algn="ctr"/>
+            <a:r>
+              <a:rPr sz="900" b="1" i="0">
+                <a:solidFill>
+                  <a:srgbClr val="FFFFFF"/>
+                </a:solidFill>
+                <a:latin typeface="Arial"/>
+              </a:rPr>
+              <a:t>5</a:t>
+            </a:r>
+          </a:p>
+        </p:txBody>
+      </p:sp>
+      <p:sp>
+        <p:nvSpPr>
+          <p:cNvPr id="223" name="AP6 badge"/>
+          <p:cNvSpPr/>
+          <p:nvPr/>
+        </p:nvSpPr>
+        <p:spPr>
+          <a:xfrm>
+            <a:off x="8439912" y="3204972"/>
+            <a:ext cx="219456" cy="219456"/>
+          </a:xfrm>
+          <a:prstGeom prst="ellipse">
+            <a:avLst/>
+          </a:prstGeom>
+          <a:solidFill>
+            <a:srgbClr val="FFFFFF"/>
+          </a:solidFill>
+          <a:ln w="15875">
+            <a:solidFill>
+              <a:srgbClr val="C0392B"/>
+            </a:solidFill>
+          </a:ln>
+          <a:effectLst/>
+        </p:spPr>
+        <p:style>
+          <a:lnRef idx="1">
+            <a:schemeClr val="accent1"/>
+          </a:lnRef>
+          <a:fillRef idx="3">
+            <a:schemeClr val="accent1"/>
+          </a:fillRef>
+          <a:effectRef idx="2">
+            <a:schemeClr val="accent1"/>
+          </a:effectRef>
+          <a:fontRef idx="minor">
+            <a:schemeClr val="lt1"/>
+          </a:fontRef>
+        </p:style>
+        <p:txBody>
+          <a:bodyPr rtlCol="0" anchor="ctr" wrap="square" lIns="45720" rIns="45720" tIns="18288" bIns="18288"/>
+          <a:lstStyle/>
+          <a:p>
+            <a:pPr algn="ctr"/>
+            <a:r>
+              <a:rPr sz="900" b="1" i="0">
+                <a:solidFill>
+                  <a:srgbClr val="C0392B"/>
+                </a:solidFill>
+                <a:latin typeface="Arial"/>
+              </a:rPr>
+              <a:t>6</a:t>
+            </a:r>
+          </a:p>
+        </p:txBody>
+      </p:sp>
+      <p:sp>
+        <p:nvSpPr>
+          <p:cNvPr id="224" name="AP1 badge"/>
+          <p:cNvSpPr/>
+          <p:nvPr/>
+        </p:nvSpPr>
+        <p:spPr>
+          <a:xfrm>
+            <a:off x="2286000" y="3511296"/>
+            <a:ext cx="219456" cy="219456"/>
+          </a:xfrm>
+          <a:prstGeom prst="ellipse">
+            <a:avLst/>
+          </a:prstGeom>
+          <a:solidFill>
+            <a:srgbClr val="FFFFFF"/>
+          </a:solidFill>
+          <a:ln w="15875">
+            <a:solidFill>
+              <a:srgbClr val="C0392B"/>
+            </a:solidFill>
+          </a:ln>
+          <a:effectLst/>
+        </p:spPr>
+        <p:style>
+          <a:lnRef idx="1">
+            <a:schemeClr val="accent1"/>
+          </a:lnRef>
+          <a:fillRef idx="3">
+            <a:schemeClr val="accent1"/>
+          </a:fillRef>
+          <a:effectRef idx="2">
+            <a:schemeClr val="accent1"/>
+          </a:effectRef>
+          <a:fontRef idx="minor">
+            <a:schemeClr val="lt1"/>
+          </a:fontRef>
+        </p:style>
+        <p:txBody>
+          <a:bodyPr rtlCol="0" anchor="ctr" wrap="square" lIns="45720" rIns="45720" tIns="18288" bIns="18288"/>
+          <a:lstStyle/>
+          <a:p>
+            <a:pPr algn="ctr"/>
+            <a:r>
+              <a:rPr sz="900" b="1" i="0">
+                <a:solidFill>
+                  <a:srgbClr val="C0392B"/>
+                </a:solidFill>
+                <a:latin typeface="Arial"/>
+              </a:rPr>
+              <a:t>1</a:t>
+            </a:r>
+          </a:p>
+        </p:txBody>
+      </p:sp>
+      <p:sp>
+        <p:nvSpPr>
+          <p:cNvPr id="225" name="AP1 legend"/>
+          <p:cNvSpPr/>
+          <p:nvPr/>
+        </p:nvSpPr>
+        <p:spPr>
+          <a:xfrm>
+            <a:off x="2542032" y="3502152"/>
+            <a:ext cx="3017520" cy="246888"/>
+          </a:xfrm>
+          <a:prstGeom prst="rect">
+            <a:avLst/>
+          </a:prstGeom>
+          <a:noFill/>
+          <a:ln>
+            <a:noFill/>
+          </a:ln>
+          <a:effectLst/>
+        </p:spPr>
+        <p:style>
+          <a:lnRef idx="1">
+            <a:schemeClr val="accent1"/>
+          </a:lnRef>
+          <a:fillRef idx="3">
+            <a:schemeClr val="accent1"/>
+          </a:fillRef>
+          <a:effectRef idx="2">
+            <a:schemeClr val="accent1"/>
+          </a:effectRef>
+          <a:fontRef idx="minor">
+            <a:schemeClr val="lt1"/>
+          </a:fontRef>
+        </p:style>
+        <p:txBody>
+          <a:bodyPr rtlCol="0" anchor="ctr" wrap="square" lIns="45720" rIns="45720" tIns="18288" bIns="18288"/>
+          <a:lstStyle/>
+          <a:p>
+            <a:pPr algn="l"/>
+            <a:r>
+              <a:rPr sz="800" b="0" i="0">
+                <a:solidFill>
+                  <a:srgbClr val="C0392B"/>
+                </a:solidFill>
+                <a:latin typeface="Arial"/>
+              </a:rPr>
+              <a:t>AP1  RF waveform injection</a:t>
+            </a:r>
+          </a:p>
+        </p:txBody>
+      </p:sp>
+      <p:sp>
+        <p:nvSpPr>
+          <p:cNvPr id="226" name="AP2 badge"/>
+          <p:cNvSpPr/>
+          <p:nvPr/>
+        </p:nvSpPr>
+        <p:spPr>
+          <a:xfrm>
+            <a:off x="5577840" y="3511296"/>
+            <a:ext cx="219456" cy="219456"/>
+          </a:xfrm>
+          <a:prstGeom prst="ellipse">
+            <a:avLst/>
+          </a:prstGeom>
+          <a:solidFill>
+            <a:srgbClr val="FFFFFF"/>
+          </a:solidFill>
+          <a:ln w="15875">
+            <a:solidFill>
+              <a:srgbClr val="C0392B"/>
+            </a:solidFill>
+          </a:ln>
+          <a:effectLst/>
+        </p:spPr>
+        <p:style>
+          <a:lnRef idx="1">
+            <a:schemeClr val="accent1"/>
+          </a:lnRef>
+          <a:fillRef idx="3">
+            <a:schemeClr val="accent1"/>
+          </a:fillRef>
+          <a:effectRef idx="2">
+            <a:schemeClr val="accent1"/>
+          </a:effectRef>
+          <a:fontRef idx="minor">
+            <a:schemeClr val="lt1"/>
+          </a:fontRef>
+        </p:style>
+        <p:txBody>
+          <a:bodyPr rtlCol="0" anchor="ctr" wrap="square" lIns="45720" rIns="45720" tIns="18288" bIns="18288"/>
+          <a:lstStyle/>
+          <a:p>
+            <a:pPr algn="ctr"/>
+            <a:r>
+              <a:rPr sz="900" b="1" i="0">
+                <a:solidFill>
+                  <a:srgbClr val="C0392B"/>
+                </a:solidFill>
+                <a:latin typeface="Arial"/>
+              </a:rPr>
+              <a:t>2</a:t>
+            </a:r>
+          </a:p>
+        </p:txBody>
+      </p:sp>
+      <p:sp>
+        <p:nvSpPr>
+          <p:cNvPr id="227" name="AP2 legend"/>
+          <p:cNvSpPr/>
+          <p:nvPr/>
+        </p:nvSpPr>
+        <p:spPr>
+          <a:xfrm>
+            <a:off x="5833872" y="3502152"/>
+            <a:ext cx="3017520" cy="246888"/>
+          </a:xfrm>
+          <a:prstGeom prst="rect">
+            <a:avLst/>
+          </a:prstGeom>
+          <a:noFill/>
+          <a:ln>
+            <a:noFill/>
+          </a:ln>
+          <a:effectLst/>
+        </p:spPr>
+        <p:style>
+          <a:lnRef idx="1">
+            <a:schemeClr val="accent1"/>
+          </a:lnRef>
+          <a:fillRef idx="3">
+            <a:schemeClr val="accent1"/>
+          </a:fillRef>
+          <a:effectRef idx="2">
+            <a:schemeClr val="accent1"/>
+          </a:effectRef>
+          <a:fontRef idx="minor">
+            <a:schemeClr val="lt1"/>
+          </a:fontRef>
+        </p:style>
+        <p:txBody>
+          <a:bodyPr rtlCol="0" anchor="ctr" wrap="square" lIns="45720" rIns="45720" tIns="18288" bIns="18288"/>
+          <a:lstStyle/>
+          <a:p>
+            <a:pPr algn="l"/>
+            <a:r>
+              <a:rPr sz="800" b="0" i="0">
+                <a:solidFill>
+                  <a:srgbClr val="C0392B"/>
+                </a:solidFill>
+                <a:latin typeface="Arial"/>
+              </a:rPr>
+              <a:t>AP2  Noise-floor poisoning (G1)</a:t>
+            </a:r>
+          </a:p>
+        </p:txBody>
+      </p:sp>
+      <p:sp>
+        <p:nvSpPr>
+          <p:cNvPr id="228" name="AP3 badge"/>
+          <p:cNvSpPr/>
+          <p:nvPr/>
+        </p:nvSpPr>
+        <p:spPr>
+          <a:xfrm>
+            <a:off x="2286000" y="3776472"/>
+            <a:ext cx="219456" cy="219456"/>
+          </a:xfrm>
+          <a:prstGeom prst="ellipse">
+            <a:avLst/>
+          </a:prstGeom>
+          <a:solidFill>
+            <a:srgbClr val="FFFFFF"/>
+          </a:solidFill>
+          <a:ln w="15875">
+            <a:solidFill>
+              <a:srgbClr val="C0392B"/>
+            </a:solidFill>
+          </a:ln>
+          <a:effectLst/>
+        </p:spPr>
+        <p:style>
+          <a:lnRef idx="1">
+            <a:schemeClr val="accent1"/>
+          </a:lnRef>
+          <a:fillRef idx="3">
+            <a:schemeClr val="accent1"/>
+          </a:fillRef>
+          <a:effectRef idx="2">
+            <a:schemeClr val="accent1"/>
+          </a:effectRef>
+          <a:fontRef idx="minor">
+            <a:schemeClr val="lt1"/>
+          </a:fontRef>
+        </p:style>
+        <p:txBody>
+          <a:bodyPr rtlCol="0" anchor="ctr" wrap="square" lIns="45720" rIns="45720" tIns="18288" bIns="18288"/>
+          <a:lstStyle/>
+          <a:p>
+            <a:pPr algn="ctr"/>
+            <a:r>
+              <a:rPr sz="900" b="1" i="0">
+                <a:solidFill>
+                  <a:srgbClr val="C0392B"/>
+                </a:solidFill>
+                <a:latin typeface="Arial"/>
+              </a:rPr>
+              <a:t>3</a:t>
+            </a:r>
+          </a:p>
+        </p:txBody>
+      </p:sp>
+      <p:sp>
+        <p:nvSpPr>
+          <p:cNvPr id="229" name="AP3 legend"/>
+          <p:cNvSpPr/>
+          <p:nvPr/>
+        </p:nvSpPr>
+        <p:spPr>
+          <a:xfrm>
+            <a:off x="2542032" y="3767328"/>
+            <a:ext cx="3017520" cy="246888"/>
+          </a:xfrm>
+          <a:prstGeom prst="rect">
+            <a:avLst/>
+          </a:prstGeom>
+          <a:noFill/>
+          <a:ln>
+            <a:noFill/>
+          </a:ln>
+          <a:effectLst/>
+        </p:spPr>
+        <p:style>
+          <a:lnRef idx="1">
+            <a:schemeClr val="accent1"/>
+          </a:lnRef>
+          <a:fillRef idx="3">
+            <a:schemeClr val="accent1"/>
+          </a:fillRef>
+          <a:effectRef idx="2">
+            <a:schemeClr val="accent1"/>
+          </a:effectRef>
+          <a:fontRef idx="minor">
+            <a:schemeClr val="lt1"/>
+          </a:fontRef>
+        </p:style>
+        <p:txBody>
+          <a:bodyPr rtlCol="0" anchor="ctr" wrap="square" lIns="45720" rIns="45720" tIns="18288" bIns="18288"/>
+          <a:lstStyle/>
+          <a:p>
+            <a:pPr algn="l"/>
+            <a:r>
+              <a:rPr sz="800" b="0" i="0">
+                <a:solidFill>
+                  <a:srgbClr val="C0392B"/>
+                </a:solidFill>
+                <a:latin typeface="Arial"/>
+              </a:rPr>
+              <a:t>AP3  Phantom events, bridging, boundary shift (G2–G4)</a:t>
+            </a:r>
+          </a:p>
+        </p:txBody>
+      </p:sp>
+      <p:sp>
+        <p:nvSpPr>
+          <p:cNvPr id="230" name="AP4 badge"/>
+          <p:cNvSpPr/>
+          <p:nvPr/>
+        </p:nvSpPr>
+        <p:spPr>
+          <a:xfrm>
+            <a:off x="5577840" y="3776472"/>
+            <a:ext cx="219456" cy="219456"/>
+          </a:xfrm>
+          <a:prstGeom prst="ellipse">
+            <a:avLst/>
+          </a:prstGeom>
+          <a:solidFill>
+            <a:srgbClr val="FFFFFF"/>
+          </a:solidFill>
+          <a:ln w="15875">
+            <a:solidFill>
+              <a:srgbClr val="C0392B"/>
+            </a:solidFill>
+          </a:ln>
+          <a:effectLst/>
+        </p:spPr>
+        <p:style>
+          <a:lnRef idx="1">
+            <a:schemeClr val="accent1"/>
+          </a:lnRef>
+          <a:fillRef idx="3">
+            <a:schemeClr val="accent1"/>
+          </a:fillRef>
+          <a:effectRef idx="2">
+            <a:schemeClr val="accent1"/>
+          </a:effectRef>
+          <a:fontRef idx="minor">
+            <a:schemeClr val="lt1"/>
+          </a:fontRef>
+        </p:style>
+        <p:txBody>
+          <a:bodyPr rtlCol="0" anchor="ctr" wrap="square" lIns="45720" rIns="45720" tIns="18288" bIns="18288"/>
+          <a:lstStyle/>
+          <a:p>
+            <a:pPr algn="ctr"/>
+            <a:r>
+              <a:rPr sz="900" b="1" i="0">
+                <a:solidFill>
+                  <a:srgbClr val="C0392B"/>
+                </a:solidFill>
+                <a:latin typeface="Arial"/>
+              </a:rPr>
+              <a:t>4</a:t>
+            </a:r>
+          </a:p>
+        </p:txBody>
+      </p:sp>
+      <p:sp>
+        <p:nvSpPr>
+          <p:cNvPr id="231" name="AP4 legend"/>
+          <p:cNvSpPr/>
+          <p:nvPr/>
+        </p:nvSpPr>
+        <p:spPr>
+          <a:xfrm>
+            <a:off x="5833872" y="3767328"/>
+            <a:ext cx="3017520" cy="246888"/>
+          </a:xfrm>
+          <a:prstGeom prst="rect">
+            <a:avLst/>
+          </a:prstGeom>
+          <a:noFill/>
+          <a:ln>
+            <a:noFill/>
+          </a:ln>
+          <a:effectLst/>
+        </p:spPr>
+        <p:style>
+          <a:lnRef idx="1">
+            <a:schemeClr val="accent1"/>
+          </a:lnRef>
+          <a:fillRef idx="3">
+            <a:schemeClr val="accent1"/>
+          </a:fillRef>
+          <a:effectRef idx="2">
+            <a:schemeClr val="accent1"/>
+          </a:effectRef>
+          <a:fontRef idx="minor">
+            <a:schemeClr val="lt1"/>
+          </a:fontRef>
+        </p:style>
+        <p:txBody>
+          <a:bodyPr rtlCol="0" anchor="ctr" wrap="square" lIns="45720" rIns="45720" tIns="18288" bIns="18288"/>
+          <a:lstStyle/>
+          <a:p>
+            <a:pPr algn="l"/>
+            <a:r>
+              <a:rPr sz="800" b="0" i="0">
+                <a:solidFill>
+                  <a:srgbClr val="C0392B"/>
+                </a:solidFill>
+                <a:latin typeface="Arial"/>
+              </a:rPr>
+              <a:t>AP4  Max-energy window hijacking (G5)</a:t>
+            </a:r>
+          </a:p>
+        </p:txBody>
+      </p:sp>
+      <p:sp>
+        <p:nvSpPr>
+          <p:cNvPr id="232" name="AP5 badge"/>
+          <p:cNvSpPr/>
+          <p:nvPr/>
+        </p:nvSpPr>
+        <p:spPr>
+          <a:xfrm>
+            <a:off x="2286000" y="4041648"/>
+            <a:ext cx="219456" cy="219456"/>
+          </a:xfrm>
+          <a:prstGeom prst="ellipse">
+            <a:avLst/>
+          </a:prstGeom>
+          <a:solidFill>
+            <a:srgbClr val="C0392B"/>
+          </a:solidFill>
+          <a:ln w="15875">
+            <a:solidFill>
+              <a:srgbClr val="C0392B"/>
+            </a:solidFill>
+          </a:ln>
+          <a:effectLst/>
+        </p:spPr>
+        <p:style>
+          <a:lnRef idx="1">
+            <a:schemeClr val="accent1"/>
+          </a:lnRef>
+          <a:fillRef idx="3">
+            <a:schemeClr val="accent1"/>
+          </a:fillRef>
+          <a:effectRef idx="2">
+            <a:schemeClr val="accent1"/>
+          </a:effectRef>
+          <a:fontRef idx="minor">
+            <a:schemeClr val="lt1"/>
+          </a:fontRef>
+        </p:style>
+        <p:txBody>
+          <a:bodyPr rtlCol="0" anchor="ctr" wrap="square" lIns="45720" rIns="45720" tIns="18288" bIns="18288"/>
+          <a:lstStyle/>
+          <a:p>
+            <a:pPr algn="ctr"/>
+            <a:r>
+              <a:rPr sz="900" b="1" i="0">
+                <a:solidFill>
+                  <a:srgbClr val="FFFFFF"/>
+                </a:solidFill>
+                <a:latin typeface="Arial"/>
+              </a:rPr>
+              <a:t>5</a:t>
+            </a:r>
+          </a:p>
+        </p:txBody>
+      </p:sp>
+      <p:sp>
+        <p:nvSpPr>
+          <p:cNvPr id="233" name="AP5 legend"/>
+          <p:cNvSpPr/>
+          <p:nvPr/>
+        </p:nvSpPr>
+        <p:spPr>
+          <a:xfrm>
+            <a:off x="2542032" y="4032504"/>
+            <a:ext cx="3017520" cy="246888"/>
+          </a:xfrm>
+          <a:prstGeom prst="rect">
+            <a:avLst/>
+          </a:prstGeom>
+          <a:noFill/>
+          <a:ln>
+            <a:noFill/>
+          </a:ln>
+          <a:effectLst/>
+        </p:spPr>
+        <p:style>
+          <a:lnRef idx="1">
+            <a:schemeClr val="accent1"/>
+          </a:lnRef>
+          <a:fillRef idx="3">
+            <a:schemeClr val="accent1"/>
+          </a:fillRef>
+          <a:effectRef idx="2">
+            <a:schemeClr val="accent1"/>
+          </a:effectRef>
+          <a:fontRef idx="minor">
+            <a:schemeClr val="lt1"/>
+          </a:fontRef>
+        </p:style>
+        <p:txBody>
+          <a:bodyPr rtlCol="0" anchor="ctr" wrap="square" lIns="45720" rIns="45720" tIns="18288" bIns="18288"/>
+          <a:lstStyle/>
+          <a:p>
+            <a:pPr algn="l"/>
+            <a:r>
+              <a:rPr sz="800" b="1" i="0">
+                <a:solidFill>
+                  <a:srgbClr val="C0392B"/>
+                </a:solidFill>
+                <a:latin typeface="Arial"/>
+              </a:rPr>
+              <a:t>AP5  AMC evasion + defense-router manipulation (G6–G7)  ← this work</a:t>
+            </a:r>
+          </a:p>
+        </p:txBody>
+      </p:sp>
+      <p:sp>
+        <p:nvSpPr>
+          <p:cNvPr id="234" name="AP6 badge"/>
+          <p:cNvSpPr/>
+          <p:nvPr/>
+        </p:nvSpPr>
+        <p:spPr>
+          <a:xfrm>
+            <a:off x="5577840" y="4041648"/>
+            <a:ext cx="219456" cy="219456"/>
+          </a:xfrm>
+          <a:prstGeom prst="ellipse">
+            <a:avLst/>
+          </a:prstGeom>
+          <a:solidFill>
+            <a:srgbClr val="FFFFFF"/>
+          </a:solidFill>
+          <a:ln w="15875">
+            <a:solidFill>
+              <a:srgbClr val="C0392B"/>
+            </a:solidFill>
+          </a:ln>
+          <a:effectLst/>
+        </p:spPr>
+        <p:style>
+          <a:lnRef idx="1">
+            <a:schemeClr val="accent1"/>
+          </a:lnRef>
+          <a:fillRef idx="3">
+            <a:schemeClr val="accent1"/>
+          </a:fillRef>
+          <a:effectRef idx="2">
+            <a:schemeClr val="accent1"/>
+          </a:effectRef>
+          <a:fontRef idx="minor">
+            <a:schemeClr val="lt1"/>
+          </a:fontRef>
+        </p:style>
+        <p:txBody>
+          <a:bodyPr rtlCol="0" anchor="ctr" wrap="square" lIns="45720" rIns="45720" tIns="18288" bIns="18288"/>
+          <a:lstStyle/>
+          <a:p>
+            <a:pPr algn="ctr"/>
+            <a:r>
+              <a:rPr sz="900" b="1" i="0">
+                <a:solidFill>
+                  <a:srgbClr val="C0392B"/>
+                </a:solidFill>
+                <a:latin typeface="Arial"/>
+              </a:rPr>
+              <a:t>6</a:t>
+            </a:r>
+          </a:p>
+        </p:txBody>
+      </p:sp>
+      <p:sp>
+        <p:nvSpPr>
+          <p:cNvPr id="235" name="AP6 legend"/>
+          <p:cNvSpPr/>
+          <p:nvPr/>
+        </p:nvSpPr>
+        <p:spPr>
+          <a:xfrm>
+            <a:off x="5833872" y="4032504"/>
+            <a:ext cx="3017520" cy="246888"/>
+          </a:xfrm>
+          <a:prstGeom prst="rect">
+            <a:avLst/>
+          </a:prstGeom>
+          <a:noFill/>
+          <a:ln>
+            <a:noFill/>
+          </a:ln>
+          <a:effectLst/>
+        </p:spPr>
+        <p:style>
+          <a:lnRef idx="1">
+            <a:schemeClr val="accent1"/>
+          </a:lnRef>
+          <a:fillRef idx="3">
+            <a:schemeClr val="accent1"/>
+          </a:fillRef>
+          <a:effectRef idx="2">
+            <a:schemeClr val="accent1"/>
+          </a:effectRef>
+          <a:fontRef idx="minor">
+            <a:schemeClr val="lt1"/>
+          </a:fontRef>
+        </p:style>
+        <p:txBody>
+          <a:bodyPr rtlCol="0" anchor="ctr" wrap="square" lIns="45720" rIns="45720" tIns="18288" bIns="18288"/>
+          <a:lstStyle/>
+          <a:p>
+            <a:pPr algn="l"/>
+            <a:r>
+              <a:rPr sz="800" b="0" i="0">
+                <a:solidFill>
+                  <a:srgbClr val="C0392B"/>
+                </a:solidFill>
+                <a:latin typeface="Arial"/>
+              </a:rPr>
+              <a:t>AP6  Evidence ambiguity, queue flooding (G2, G8)</a:t>
+            </a:r>
+          </a:p>
+        </p:txBody>
+      </p:sp>
+      <p:sp>
+        <p:nvSpPr>
+          <p:cNvPr id="236" name="Protected assets"/>
+          <p:cNvSpPr/>
+          <p:nvPr/>
+        </p:nvSpPr>
+        <p:spPr>
+          <a:xfrm>
+            <a:off x="2176272" y="4453128"/>
+            <a:ext cx="6693408" cy="347472"/>
+          </a:xfrm>
+          <a:prstGeom prst="roundRect">
+            <a:avLst>
+              <a:gd name="adj" fmla="val 15000"/>
+            </a:avLst>
+          </a:prstGeom>
+          <a:solidFill>
+            <a:srgbClr val="F1F3F6"/>
+          </a:solidFill>
+          <a:ln w="9525">
+            <a:solidFill>
+              <a:srgbClr val="4A5568"/>
+            </a:solidFill>
+          </a:ln>
+          <a:effectLst/>
+        </p:spPr>
+        <p:style>
+          <a:lnRef idx="1">
+            <a:schemeClr val="accent1"/>
+          </a:lnRef>
+          <a:fillRef idx="3">
+            <a:schemeClr val="accent1"/>
+          </a:fillRef>
+          <a:effectRef idx="2">
+            <a:schemeClr val="accent1"/>
+          </a:effectRef>
+          <a:fontRef idx="minor">
+            <a:schemeClr val="lt1"/>
+          </a:fontRef>
+        </p:style>
+        <p:txBody>
+          <a:bodyPr rtlCol="0" anchor="ctr" wrap="square" lIns="45720" rIns="45720" tIns="18288" bIns="18288"/>
+          <a:lstStyle/>
+          <a:p>
+            <a:pPr algn="l"/>
+            <a:r>
+              <a:rPr sz="850" b="1" i="0">
+                <a:solidFill>
+                  <a:srgbClr val="333333"/>
+                </a:solidFill>
+                <a:latin typeface="Arial"/>
+              </a:rPr>
+              <a:t>PROTECTED ASSETS   </a:t>
+            </a:r>
+            <a:r>
+              <a:rPr sz="850" b="0" i="0">
+                <a:solidFill>
+                  <a:srgbClr val="333333"/>
+                </a:solidFill>
+                <a:latin typeface="Arial"/>
+              </a:rPr>
+              <a:t>Occupancy · event timeline · AMC / abstention · availability · evidence · failure visibility</a:t>
             </a:r>
           </a:p>
         </p:txBody>
@@ -18270,109 +21551,1920 @@
           </a:p>
         </p:txBody>
       </p:sp>
-      <p:pic>
-        <p:nvPicPr>
-          <p:cNvPr id="173" name="Picture 172" descr="fig3_attacker_tiers.png"/>
-          <p:cNvPicPr>
-            <a:picLocks noChangeAspect="1"/>
-          </p:cNvPicPr>
+      <p:sp>
+        <p:nvSpPr>
+          <p:cNvPr id="173" name="Defender-controlled boundary"/>
+          <p:cNvSpPr/>
           <p:nvPr/>
-        </p:nvPicPr>
-        <p:blipFill>
-          <a:blip r:embed="rId2"/>
-          <a:stretch>
-            <a:fillRect/>
-          </a:stretch>
-        </p:blipFill>
-        <p:spPr>
-          <a:xfrm>
-            <a:off x="320040" y="1325880"/>
-            <a:ext cx="5623560" cy="3413969"/>
-          </a:xfrm>
-          <a:prstGeom prst="rect">
-            <a:avLst/>
-          </a:prstGeom>
-        </p:spPr>
-      </p:pic>
-      <p:sp>
-        <p:nvSpPr>
-          <p:cNvPr id="174" name="TextBox 173"/>
-          <p:cNvSpPr txBox="1"/>
-          <p:nvPr/>
-        </p:nvSpPr>
-        <p:spPr>
-          <a:xfrm>
-            <a:off x="6172200" y="1417320"/>
-            <a:ext cx="2651760" cy="3291840"/>
-          </a:xfrm>
-          <a:prstGeom prst="rect">
-            <a:avLst/>
+        </p:nvSpPr>
+        <p:spPr>
+          <a:xfrm>
+            <a:off x="2340863" y="1545336"/>
+            <a:ext cx="6409944" cy="603504"/>
+          </a:xfrm>
+          <a:prstGeom prst="roundRect">
+            <a:avLst>
+              <a:gd name="adj" fmla="val 12000"/>
+            </a:avLst>
           </a:prstGeom>
           <a:noFill/>
-        </p:spPr>
+          <a:ln w="12700">
+            <a:solidFill>
+              <a:srgbClr val="4A5568"/>
+            </a:solidFill>
+            <a:prstDash val="dash"/>
+          </a:ln>
+          <a:effectLst/>
+        </p:spPr>
+        <p:style>
+          <a:lnRef idx="1">
+            <a:schemeClr val="accent1"/>
+          </a:lnRef>
+          <a:fillRef idx="3">
+            <a:schemeClr val="accent1"/>
+          </a:fillRef>
+          <a:effectRef idx="2">
+            <a:schemeClr val="accent1"/>
+          </a:effectRef>
+          <a:fontRef idx="minor">
+            <a:schemeClr val="lt1"/>
+          </a:fontRef>
+        </p:style>
         <p:txBody>
-          <a:bodyPr wrap="square">
-            <a:spAutoFit/>
-          </a:bodyPr>
+          <a:bodyPr rtlCol="0" anchor="ctr" wrap="square" lIns="45720" rIns="45720" tIns="18288" bIns="18288"/>
           <a:lstStyle/>
           <a:p>
-            <a:pPr>
-              <a:spcAft>
-                <a:spcPts val="400"/>
-              </a:spcAft>
-            </a:pPr>
-            <a:r>
-              <a:rPr sz="1200" i="0" b="1">
+            <a:pPr algn="ctr"/>
+            <a:r>
+              <a:rPr sz="900" b="0" i="0">
                 <a:solidFill>
                   <a:srgbClr val="333333"/>
                 </a:solidFill>
+                <a:latin typeface="Arial"/>
               </a:rPr>
-              <a:t>All results in this talk: A0</a:t>
-            </a:r>
-          </a:p>
-          <a:p>
-            <a:pPr>
-              <a:spcAft>
-                <a:spcPts val="400"/>
-              </a:spcAft>
-            </a:pPr>
-            <a:r>
-              <a:rPr sz="1200" i="0" b="0">
+              <a:t/>
+            </a:r>
+          </a:p>
+        </p:txBody>
+      </p:sp>
+      <p:sp>
+        <p:nvSpPr>
+          <p:cNvPr id="174" name="Rectangle 173"/>
+          <p:cNvSpPr/>
+          <p:nvPr/>
+        </p:nvSpPr>
+        <p:spPr>
+          <a:xfrm>
+            <a:off x="2414015" y="1371600"/>
+            <a:ext cx="2926080" cy="182880"/>
+          </a:xfrm>
+          <a:prstGeom prst="rect">
+            <a:avLst/>
+          </a:prstGeom>
+          <a:noFill/>
+          <a:ln>
+            <a:noFill/>
+          </a:ln>
+          <a:effectLst/>
+        </p:spPr>
+        <p:style>
+          <a:lnRef idx="1">
+            <a:schemeClr val="accent1"/>
+          </a:lnRef>
+          <a:fillRef idx="3">
+            <a:schemeClr val="accent1"/>
+          </a:fillRef>
+          <a:effectRef idx="2">
+            <a:schemeClr val="accent1"/>
+          </a:effectRef>
+          <a:fontRef idx="minor">
+            <a:schemeClr val="lt1"/>
+          </a:fontRef>
+        </p:style>
+        <p:txBody>
+          <a:bodyPr rtlCol="0" anchor="t" wrap="square" lIns="45720" rIns="45720" tIns="18288" bIns="18288"/>
+          <a:lstStyle/>
+          <a:p>
+            <a:pPr algn="l"/>
+            <a:r>
+              <a:rPr sz="750" b="1" i="0">
+                <a:solidFill>
+                  <a:srgbClr val="6B6B6B"/>
+                </a:solidFill>
+                <a:latin typeface="Arial"/>
+              </a:rPr>
+              <a:t>DEFENDER-CONTROLLED BOUNDARY</a:t>
+            </a:r>
+          </a:p>
+        </p:txBody>
+      </p:sp>
+      <p:sp>
+        <p:nvSpPr>
+          <p:cNvPr id="175" name="Chain Untrusted RF"/>
+          <p:cNvSpPr/>
+          <p:nvPr/>
+        </p:nvSpPr>
+        <p:spPr>
+          <a:xfrm>
+            <a:off x="274320" y="1700784"/>
+            <a:ext cx="914400" cy="292608"/>
+          </a:xfrm>
+          <a:prstGeom prst="roundRect">
+            <a:avLst>
+              <a:gd name="adj" fmla="val 15000"/>
+            </a:avLst>
+          </a:prstGeom>
+          <a:solidFill>
+            <a:srgbClr val="FFFFFF"/>
+          </a:solidFill>
+          <a:ln w="9525">
+            <a:solidFill>
+              <a:srgbClr val="4A5568"/>
+            </a:solidFill>
+          </a:ln>
+          <a:effectLst/>
+        </p:spPr>
+        <p:style>
+          <a:lnRef idx="1">
+            <a:schemeClr val="accent1"/>
+          </a:lnRef>
+          <a:fillRef idx="3">
+            <a:schemeClr val="accent1"/>
+          </a:fillRef>
+          <a:effectRef idx="2">
+            <a:schemeClr val="accent1"/>
+          </a:effectRef>
+          <a:fontRef idx="minor">
+            <a:schemeClr val="lt1"/>
+          </a:fontRef>
+        </p:style>
+        <p:txBody>
+          <a:bodyPr rtlCol="0" anchor="ctr" wrap="square" lIns="45720" rIns="45720" tIns="18288" bIns="18288"/>
+          <a:lstStyle/>
+          <a:p>
+            <a:pPr algn="ctr"/>
+            <a:r>
+              <a:rPr sz="800" b="1" i="0">
                 <a:solidFill>
                   <a:srgbClr val="333333"/>
                 </a:solidFill>
+                <a:latin typeface="Arial"/>
               </a:rPr>
-              <a:t>Digital injection = algorithmic upper bound, not an OTA claim</a:t>
-            </a:r>
-          </a:p>
-          <a:p>
-            <a:pPr>
-              <a:spcAft>
-                <a:spcPts val="400"/>
-              </a:spcAft>
-            </a:pPr>
-            <a:r>
-              <a:rPr sz="1200" i="0" b="0">
+              <a:t>Untrusted RF</a:t>
+            </a:r>
+          </a:p>
+        </p:txBody>
+      </p:sp>
+      <p:cxnSp>
+        <p:nvCxnSpPr>
+          <p:cNvPr id="176" name="Connector 175"/>
+          <p:cNvCxnSpPr/>
+          <p:nvPr/>
+        </p:nvCxnSpPr>
+        <p:spPr>
+          <a:xfrm>
+            <a:off x="1188720" y="1847088"/>
+            <a:ext cx="155448" cy="0"/>
+          </a:xfrm>
+          <a:prstGeom prst="line">
+            <a:avLst/>
+          </a:prstGeom>
+          <a:ln w="12700">
+            <a:solidFill>
+              <a:srgbClr val="4A5568"/>
+            </a:solidFill>
+          </a:ln>
+        </p:spPr>
+        <p:style>
+          <a:lnRef idx="2">
+            <a:schemeClr val="accent1"/>
+          </a:lnRef>
+          <a:fillRef idx="0">
+            <a:schemeClr val="accent1"/>
+          </a:fillRef>
+          <a:effectRef idx="1">
+            <a:schemeClr val="accent1"/>
+          </a:effectRef>
+          <a:fontRef idx="minor">
+            <a:schemeClr val="tx1"/>
+          </a:fontRef>
+        </p:style>
+      </p:cxnSp>
+      <p:sp>
+        <p:nvSpPr>
+          <p:cNvPr id="177" name="Chain Antenna / RF"/>
+          <p:cNvSpPr/>
+          <p:nvPr/>
+        </p:nvSpPr>
+        <p:spPr>
+          <a:xfrm>
+            <a:off x="1344168" y="1700784"/>
+            <a:ext cx="914400" cy="292608"/>
+          </a:xfrm>
+          <a:prstGeom prst="roundRect">
+            <a:avLst>
+              <a:gd name="adj" fmla="val 15000"/>
+            </a:avLst>
+          </a:prstGeom>
+          <a:solidFill>
+            <a:srgbClr val="FFFFFF"/>
+          </a:solidFill>
+          <a:ln w="9525">
+            <a:solidFill>
+              <a:srgbClr val="4A5568"/>
+            </a:solidFill>
+          </a:ln>
+          <a:effectLst/>
+        </p:spPr>
+        <p:style>
+          <a:lnRef idx="1">
+            <a:schemeClr val="accent1"/>
+          </a:lnRef>
+          <a:fillRef idx="3">
+            <a:schemeClr val="accent1"/>
+          </a:fillRef>
+          <a:effectRef idx="2">
+            <a:schemeClr val="accent1"/>
+          </a:effectRef>
+          <a:fontRef idx="minor">
+            <a:schemeClr val="lt1"/>
+          </a:fontRef>
+        </p:style>
+        <p:txBody>
+          <a:bodyPr rtlCol="0" anchor="ctr" wrap="square" lIns="45720" rIns="45720" tIns="18288" bIns="18288"/>
+          <a:lstStyle/>
+          <a:p>
+            <a:pPr algn="ctr"/>
+            <a:r>
+              <a:rPr sz="800" b="1" i="0">
                 <a:solidFill>
                   <a:srgbClr val="333333"/>
                 </a:solidFill>
+                <a:latin typeface="Arial"/>
               </a:rPr>
-              <a:t>Attacks are defense-unaware: crafted on undefended AWN</a:t>
-            </a:r>
-          </a:p>
-          <a:p>
-            <a:pPr>
-              <a:spcAft>
-                <a:spcPts val="400"/>
-              </a:spcAft>
-            </a:pPr>
-            <a:r>
-              <a:rPr sz="1200" i="0" b="0">
+              <a:t>Antenna / RF</a:t>
+            </a:r>
+          </a:p>
+        </p:txBody>
+      </p:sp>
+      <p:cxnSp>
+        <p:nvCxnSpPr>
+          <p:cNvPr id="178" name="Connector 177"/>
+          <p:cNvCxnSpPr/>
+          <p:nvPr/>
+        </p:nvCxnSpPr>
+        <p:spPr>
+          <a:xfrm>
+            <a:off x="2258568" y="1847088"/>
+            <a:ext cx="155447" cy="0"/>
+          </a:xfrm>
+          <a:prstGeom prst="line">
+            <a:avLst/>
+          </a:prstGeom>
+          <a:ln w="12700">
+            <a:solidFill>
+              <a:srgbClr val="4A5568"/>
+            </a:solidFill>
+          </a:ln>
+        </p:spPr>
+        <p:style>
+          <a:lnRef idx="2">
+            <a:schemeClr val="accent1"/>
+          </a:lnRef>
+          <a:fillRef idx="0">
+            <a:schemeClr val="accent1"/>
+          </a:fillRef>
+          <a:effectRef idx="1">
+            <a:schemeClr val="accent1"/>
+          </a:effectRef>
+          <a:fontRef idx="minor">
+            <a:schemeClr val="tx1"/>
+          </a:fontRef>
+        </p:style>
+      </p:cxnSp>
+      <p:sp>
+        <p:nvSpPr>
+          <p:cNvPr id="179" name="Chain Trusted receiver"/>
+          <p:cNvSpPr/>
+          <p:nvPr/>
+        </p:nvSpPr>
+        <p:spPr>
+          <a:xfrm>
+            <a:off x="2414015" y="1700784"/>
+            <a:ext cx="914400" cy="292608"/>
+          </a:xfrm>
+          <a:prstGeom prst="roundRect">
+            <a:avLst>
+              <a:gd name="adj" fmla="val 15000"/>
+            </a:avLst>
+          </a:prstGeom>
+          <a:solidFill>
+            <a:srgbClr val="FFFFFF"/>
+          </a:solidFill>
+          <a:ln w="9525">
+            <a:solidFill>
+              <a:srgbClr val="4A5568"/>
+            </a:solidFill>
+          </a:ln>
+          <a:effectLst/>
+        </p:spPr>
+        <p:style>
+          <a:lnRef idx="1">
+            <a:schemeClr val="accent1"/>
+          </a:lnRef>
+          <a:fillRef idx="3">
+            <a:schemeClr val="accent1"/>
+          </a:fillRef>
+          <a:effectRef idx="2">
+            <a:schemeClr val="accent1"/>
+          </a:effectRef>
+          <a:fontRef idx="minor">
+            <a:schemeClr val="lt1"/>
+          </a:fontRef>
+        </p:style>
+        <p:txBody>
+          <a:bodyPr rtlCol="0" anchor="ctr" wrap="square" lIns="45720" rIns="45720" tIns="18288" bIns="18288"/>
+          <a:lstStyle/>
+          <a:p>
+            <a:pPr algn="ctr"/>
+            <a:r>
+              <a:rPr sz="800" b="1" i="0">
                 <a:solidFill>
                   <a:srgbClr val="333333"/>
                 </a:solidFill>
+                <a:latin typeface="Arial"/>
               </a:rPr>
-              <a:t>Next: A1 cabled / OTA, and adaptive attacks (BPDA / EOT) on the full defense</a:t>
+              <a:t>Trusted receiver</a:t>
+            </a:r>
+          </a:p>
+        </p:txBody>
+      </p:sp>
+      <p:cxnSp>
+        <p:nvCxnSpPr>
+          <p:cNvPr id="180" name="Connector 179"/>
+          <p:cNvCxnSpPr/>
+          <p:nvPr/>
+        </p:nvCxnSpPr>
+        <p:spPr>
+          <a:xfrm>
+            <a:off x="3328415" y="1847088"/>
+            <a:ext cx="155448" cy="0"/>
+          </a:xfrm>
+          <a:prstGeom prst="line">
+            <a:avLst/>
+          </a:prstGeom>
+          <a:ln w="12700">
+            <a:solidFill>
+              <a:srgbClr val="4A5568"/>
+            </a:solidFill>
+          </a:ln>
+        </p:spPr>
+        <p:style>
+          <a:lnRef idx="2">
+            <a:schemeClr val="accent1"/>
+          </a:lnRef>
+          <a:fillRef idx="0">
+            <a:schemeClr val="accent1"/>
+          </a:fillRef>
+          <a:effectRef idx="1">
+            <a:schemeClr val="accent1"/>
+          </a:effectRef>
+          <a:fontRef idx="minor">
+            <a:schemeClr val="tx1"/>
+          </a:fontRef>
+        </p:style>
+      </p:cxnSp>
+      <p:sp>
+        <p:nvSpPr>
+          <p:cNvPr id="181" name="Chain Energy detection"/>
+          <p:cNvSpPr/>
+          <p:nvPr/>
+        </p:nvSpPr>
+        <p:spPr>
+          <a:xfrm>
+            <a:off x="3483863" y="1700784"/>
+            <a:ext cx="914400" cy="292608"/>
+          </a:xfrm>
+          <a:prstGeom prst="roundRect">
+            <a:avLst>
+              <a:gd name="adj" fmla="val 15000"/>
+            </a:avLst>
+          </a:prstGeom>
+          <a:solidFill>
+            <a:srgbClr val="FFFFFF"/>
+          </a:solidFill>
+          <a:ln w="9525">
+            <a:solidFill>
+              <a:srgbClr val="4A5568"/>
+            </a:solidFill>
+          </a:ln>
+          <a:effectLst/>
+        </p:spPr>
+        <p:style>
+          <a:lnRef idx="1">
+            <a:schemeClr val="accent1"/>
+          </a:lnRef>
+          <a:fillRef idx="3">
+            <a:schemeClr val="accent1"/>
+          </a:fillRef>
+          <a:effectRef idx="2">
+            <a:schemeClr val="accent1"/>
+          </a:effectRef>
+          <a:fontRef idx="minor">
+            <a:schemeClr val="lt1"/>
+          </a:fontRef>
+        </p:style>
+        <p:txBody>
+          <a:bodyPr rtlCol="0" anchor="ctr" wrap="square" lIns="45720" rIns="45720" tIns="18288" bIns="18288"/>
+          <a:lstStyle/>
+          <a:p>
+            <a:pPr algn="ctr"/>
+            <a:r>
+              <a:rPr sz="800" b="1" i="0">
+                <a:solidFill>
+                  <a:srgbClr val="333333"/>
+                </a:solidFill>
+                <a:latin typeface="Arial"/>
+              </a:rPr>
+              <a:t>Energy detection</a:t>
+            </a:r>
+          </a:p>
+        </p:txBody>
+      </p:sp>
+      <p:cxnSp>
+        <p:nvCxnSpPr>
+          <p:cNvPr id="182" name="Connector 181"/>
+          <p:cNvCxnSpPr/>
+          <p:nvPr/>
+        </p:nvCxnSpPr>
+        <p:spPr>
+          <a:xfrm>
+            <a:off x="4398264" y="1847088"/>
+            <a:ext cx="155448" cy="0"/>
+          </a:xfrm>
+          <a:prstGeom prst="line">
+            <a:avLst/>
+          </a:prstGeom>
+          <a:ln w="12700">
+            <a:solidFill>
+              <a:srgbClr val="4A5568"/>
+            </a:solidFill>
+          </a:ln>
+        </p:spPr>
+        <p:style>
+          <a:lnRef idx="2">
+            <a:schemeClr val="accent1"/>
+          </a:lnRef>
+          <a:fillRef idx="0">
+            <a:schemeClr val="accent1"/>
+          </a:fillRef>
+          <a:effectRef idx="1">
+            <a:schemeClr val="accent1"/>
+          </a:effectRef>
+          <a:fontRef idx="minor">
+            <a:schemeClr val="tx1"/>
+          </a:fontRef>
+        </p:style>
+      </p:cxnSp>
+      <p:sp>
+        <p:nvSpPr>
+          <p:cNvPr id="183" name="Chain Segmentation"/>
+          <p:cNvSpPr/>
+          <p:nvPr/>
+        </p:nvSpPr>
+        <p:spPr>
+          <a:xfrm>
+            <a:off x="4553712" y="1700784"/>
+            <a:ext cx="914400" cy="292608"/>
+          </a:xfrm>
+          <a:prstGeom prst="roundRect">
+            <a:avLst>
+              <a:gd name="adj" fmla="val 15000"/>
+            </a:avLst>
+          </a:prstGeom>
+          <a:solidFill>
+            <a:srgbClr val="FFFFFF"/>
+          </a:solidFill>
+          <a:ln w="9525">
+            <a:solidFill>
+              <a:srgbClr val="4A5568"/>
+            </a:solidFill>
+          </a:ln>
+          <a:effectLst/>
+        </p:spPr>
+        <p:style>
+          <a:lnRef idx="1">
+            <a:schemeClr val="accent1"/>
+          </a:lnRef>
+          <a:fillRef idx="3">
+            <a:schemeClr val="accent1"/>
+          </a:fillRef>
+          <a:effectRef idx="2">
+            <a:schemeClr val="accent1"/>
+          </a:effectRef>
+          <a:fontRef idx="minor">
+            <a:schemeClr val="lt1"/>
+          </a:fontRef>
+        </p:style>
+        <p:txBody>
+          <a:bodyPr rtlCol="0" anchor="ctr" wrap="square" lIns="45720" rIns="45720" tIns="18288" bIns="18288"/>
+          <a:lstStyle/>
+          <a:p>
+            <a:pPr algn="ctr"/>
+            <a:r>
+              <a:rPr sz="800" b="1" i="0">
+                <a:solidFill>
+                  <a:srgbClr val="333333"/>
+                </a:solidFill>
+                <a:latin typeface="Arial"/>
+              </a:rPr>
+              <a:t>Segmentation</a:t>
+            </a:r>
+          </a:p>
+        </p:txBody>
+      </p:sp>
+      <p:cxnSp>
+        <p:nvCxnSpPr>
+          <p:cNvPr id="184" name="Connector 183"/>
+          <p:cNvCxnSpPr/>
+          <p:nvPr/>
+        </p:nvCxnSpPr>
+        <p:spPr>
+          <a:xfrm>
+            <a:off x="5468112" y="1847088"/>
+            <a:ext cx="155447" cy="0"/>
+          </a:xfrm>
+          <a:prstGeom prst="line">
+            <a:avLst/>
+          </a:prstGeom>
+          <a:ln w="12700">
+            <a:solidFill>
+              <a:srgbClr val="4A5568"/>
+            </a:solidFill>
+          </a:ln>
+        </p:spPr>
+        <p:style>
+          <a:lnRef idx="2">
+            <a:schemeClr val="accent1"/>
+          </a:lnRef>
+          <a:fillRef idx="0">
+            <a:schemeClr val="accent1"/>
+          </a:fillRef>
+          <a:effectRef idx="1">
+            <a:schemeClr val="accent1"/>
+          </a:effectRef>
+          <a:fontRef idx="minor">
+            <a:schemeClr val="tx1"/>
+          </a:fontRef>
+        </p:style>
+      </p:cxnSp>
+      <p:sp>
+        <p:nvSpPr>
+          <p:cNvPr id="185" name="Chain Window selection"/>
+          <p:cNvSpPr/>
+          <p:nvPr/>
+        </p:nvSpPr>
+        <p:spPr>
+          <a:xfrm>
+            <a:off x="5623559" y="1700784"/>
+            <a:ext cx="914400" cy="292608"/>
+          </a:xfrm>
+          <a:prstGeom prst="roundRect">
+            <a:avLst>
+              <a:gd name="adj" fmla="val 15000"/>
+            </a:avLst>
+          </a:prstGeom>
+          <a:solidFill>
+            <a:srgbClr val="FFFFFF"/>
+          </a:solidFill>
+          <a:ln w="9525">
+            <a:solidFill>
+              <a:srgbClr val="4A5568"/>
+            </a:solidFill>
+          </a:ln>
+          <a:effectLst/>
+        </p:spPr>
+        <p:style>
+          <a:lnRef idx="1">
+            <a:schemeClr val="accent1"/>
+          </a:lnRef>
+          <a:fillRef idx="3">
+            <a:schemeClr val="accent1"/>
+          </a:fillRef>
+          <a:effectRef idx="2">
+            <a:schemeClr val="accent1"/>
+          </a:effectRef>
+          <a:fontRef idx="minor">
+            <a:schemeClr val="lt1"/>
+          </a:fontRef>
+        </p:style>
+        <p:txBody>
+          <a:bodyPr rtlCol="0" anchor="ctr" wrap="square" lIns="45720" rIns="45720" tIns="18288" bIns="18288"/>
+          <a:lstStyle/>
+          <a:p>
+            <a:pPr algn="ctr"/>
+            <a:r>
+              <a:rPr sz="800" b="1" i="0">
+                <a:solidFill>
+                  <a:srgbClr val="333333"/>
+                </a:solidFill>
+                <a:latin typeface="Arial"/>
+              </a:rPr>
+              <a:t>Window selection</a:t>
+            </a:r>
+          </a:p>
+        </p:txBody>
+      </p:sp>
+      <p:cxnSp>
+        <p:nvCxnSpPr>
+          <p:cNvPr id="186" name="Connector 185"/>
+          <p:cNvCxnSpPr/>
+          <p:nvPr/>
+        </p:nvCxnSpPr>
+        <p:spPr>
+          <a:xfrm>
+            <a:off x="6537959" y="1847088"/>
+            <a:ext cx="155448" cy="0"/>
+          </a:xfrm>
+          <a:prstGeom prst="line">
+            <a:avLst/>
+          </a:prstGeom>
+          <a:ln w="12700">
+            <a:solidFill>
+              <a:srgbClr val="4A5568"/>
+            </a:solidFill>
+          </a:ln>
+        </p:spPr>
+        <p:style>
+          <a:lnRef idx="2">
+            <a:schemeClr val="accent1"/>
+          </a:lnRef>
+          <a:fillRef idx="0">
+            <a:schemeClr val="accent1"/>
+          </a:fillRef>
+          <a:effectRef idx="1">
+            <a:schemeClr val="accent1"/>
+          </a:effectRef>
+          <a:fontRef idx="minor">
+            <a:schemeClr val="tx1"/>
+          </a:fontRef>
+        </p:style>
+      </p:cxnSp>
+      <p:sp>
+        <p:nvSpPr>
+          <p:cNvPr id="187" name="Chain AMC / defense"/>
+          <p:cNvSpPr/>
+          <p:nvPr/>
+        </p:nvSpPr>
+        <p:spPr>
+          <a:xfrm>
+            <a:off x="6693407" y="1700784"/>
+            <a:ext cx="914400" cy="292608"/>
+          </a:xfrm>
+          <a:prstGeom prst="roundRect">
+            <a:avLst>
+              <a:gd name="adj" fmla="val 15000"/>
+            </a:avLst>
+          </a:prstGeom>
+          <a:solidFill>
+            <a:srgbClr val="FFFFFF"/>
+          </a:solidFill>
+          <a:ln w="9525">
+            <a:solidFill>
+              <a:srgbClr val="4A5568"/>
+            </a:solidFill>
+          </a:ln>
+          <a:effectLst/>
+        </p:spPr>
+        <p:style>
+          <a:lnRef idx="1">
+            <a:schemeClr val="accent1"/>
+          </a:lnRef>
+          <a:fillRef idx="3">
+            <a:schemeClr val="accent1"/>
+          </a:fillRef>
+          <a:effectRef idx="2">
+            <a:schemeClr val="accent1"/>
+          </a:effectRef>
+          <a:fontRef idx="minor">
+            <a:schemeClr val="lt1"/>
+          </a:fontRef>
+        </p:style>
+        <p:txBody>
+          <a:bodyPr rtlCol="0" anchor="ctr" wrap="square" lIns="45720" rIns="45720" tIns="18288" bIns="18288"/>
+          <a:lstStyle/>
+          <a:p>
+            <a:pPr algn="ctr"/>
+            <a:r>
+              <a:rPr sz="800" b="1" i="0">
+                <a:solidFill>
+                  <a:srgbClr val="333333"/>
+                </a:solidFill>
+                <a:latin typeface="Arial"/>
+              </a:rPr>
+              <a:t>AMC / defense</a:t>
+            </a:r>
+          </a:p>
+        </p:txBody>
+      </p:sp>
+      <p:cxnSp>
+        <p:nvCxnSpPr>
+          <p:cNvPr id="188" name="Connector 187"/>
+          <p:cNvCxnSpPr/>
+          <p:nvPr/>
+        </p:nvCxnSpPr>
+        <p:spPr>
+          <a:xfrm>
+            <a:off x="7607808" y="1847088"/>
+            <a:ext cx="155447" cy="0"/>
+          </a:xfrm>
+          <a:prstGeom prst="line">
+            <a:avLst/>
+          </a:prstGeom>
+          <a:ln w="12700">
+            <a:solidFill>
+              <a:srgbClr val="4A5568"/>
+            </a:solidFill>
+          </a:ln>
+        </p:spPr>
+        <p:style>
+          <a:lnRef idx="2">
+            <a:schemeClr val="accent1"/>
+          </a:lnRef>
+          <a:fillRef idx="0">
+            <a:schemeClr val="accent1"/>
+          </a:fillRef>
+          <a:effectRef idx="1">
+            <a:schemeClr val="accent1"/>
+          </a:effectRef>
+          <a:fontRef idx="minor">
+            <a:schemeClr val="tx1"/>
+          </a:fontRef>
+        </p:style>
+      </p:cxnSp>
+      <p:sp>
+        <p:nvSpPr>
+          <p:cNvPr id="189" name="Chain Event record"/>
+          <p:cNvSpPr/>
+          <p:nvPr/>
+        </p:nvSpPr>
+        <p:spPr>
+          <a:xfrm>
+            <a:off x="7763256" y="1700784"/>
+            <a:ext cx="914400" cy="292608"/>
+          </a:xfrm>
+          <a:prstGeom prst="roundRect">
+            <a:avLst>
+              <a:gd name="adj" fmla="val 15000"/>
+            </a:avLst>
+          </a:prstGeom>
+          <a:solidFill>
+            <a:srgbClr val="FFFFFF"/>
+          </a:solidFill>
+          <a:ln w="9525">
+            <a:solidFill>
+              <a:srgbClr val="4A5568"/>
+            </a:solidFill>
+          </a:ln>
+          <a:effectLst/>
+        </p:spPr>
+        <p:style>
+          <a:lnRef idx="1">
+            <a:schemeClr val="accent1"/>
+          </a:lnRef>
+          <a:fillRef idx="3">
+            <a:schemeClr val="accent1"/>
+          </a:fillRef>
+          <a:effectRef idx="2">
+            <a:schemeClr val="accent1"/>
+          </a:effectRef>
+          <a:fontRef idx="minor">
+            <a:schemeClr val="lt1"/>
+          </a:fontRef>
+        </p:style>
+        <p:txBody>
+          <a:bodyPr rtlCol="0" anchor="ctr" wrap="square" lIns="45720" rIns="45720" tIns="18288" bIns="18288"/>
+          <a:lstStyle/>
+          <a:p>
+            <a:pPr algn="ctr"/>
+            <a:r>
+              <a:rPr sz="800" b="1" i="0">
+                <a:solidFill>
+                  <a:srgbClr val="333333"/>
+                </a:solidFill>
+                <a:latin typeface="Arial"/>
+              </a:rPr>
+              <a:t>Event record</a:t>
+            </a:r>
+          </a:p>
+        </p:txBody>
+      </p:sp>
+      <p:sp>
+        <p:nvSpPr>
+          <p:cNvPr id="190" name="Tier A1"/>
+          <p:cNvSpPr/>
+          <p:nvPr/>
+        </p:nvSpPr>
+        <p:spPr>
+          <a:xfrm>
+            <a:off x="274320" y="2267712"/>
+            <a:ext cx="1783080" cy="384048"/>
+          </a:xfrm>
+          <a:prstGeom prst="roundRect">
+            <a:avLst>
+              <a:gd name="adj" fmla="val 8000"/>
+            </a:avLst>
+          </a:prstGeom>
+          <a:solidFill>
+            <a:srgbClr val="E8F1FA"/>
+          </a:solidFill>
+          <a:ln w="19050">
+            <a:solidFill>
+              <a:srgbClr val="1F6FB2"/>
+            </a:solidFill>
+          </a:ln>
+          <a:effectLst/>
+        </p:spPr>
+        <p:style>
+          <a:lnRef idx="1">
+            <a:schemeClr val="accent1"/>
+          </a:lnRef>
+          <a:fillRef idx="3">
+            <a:schemeClr val="accent1"/>
+          </a:fillRef>
+          <a:effectRef idx="2">
+            <a:schemeClr val="accent1"/>
+          </a:effectRef>
+          <a:fontRef idx="minor">
+            <a:schemeClr val="lt1"/>
+          </a:fontRef>
+        </p:style>
+        <p:txBody>
+          <a:bodyPr rtlCol="0" anchor="ctr" wrap="square" lIns="45720" rIns="45720" tIns="18288" bIns="18288"/>
+          <a:lstStyle/>
+          <a:p>
+            <a:pPr algn="ctr"/>
+            <a:r>
+              <a:rPr sz="900" b="1" i="0">
+                <a:solidFill>
+                  <a:srgbClr val="1F6FB2"/>
+                </a:solidFill>
+                <a:latin typeface="Arial"/>
+              </a:rPr>
+              <a:t>A1  CONTROLLED RF</a:t>
+            </a:r>
+          </a:p>
+          <a:p>
+            <a:pPr algn="ctr"/>
+            <a:r>
+              <a:rPr sz="700" b="0" i="0">
+                <a:solidFill>
+                  <a:srgbClr val="6B6B6B"/>
+                </a:solidFill>
+                <a:latin typeface="Arial"/>
+              </a:rPr>
+              <a:t>primary practical model</a:t>
+            </a:r>
+          </a:p>
+        </p:txBody>
+      </p:sp>
+      <p:sp>
+        <p:nvSpPr>
+          <p:cNvPr id="191" name="Tier A2"/>
+          <p:cNvSpPr/>
+          <p:nvPr/>
+        </p:nvSpPr>
+        <p:spPr>
+          <a:xfrm>
+            <a:off x="2194560" y="2267712"/>
+            <a:ext cx="1783080" cy="384048"/>
+          </a:xfrm>
+          <a:prstGeom prst="roundRect">
+            <a:avLst>
+              <a:gd name="adj" fmla="val 8000"/>
+            </a:avLst>
+          </a:prstGeom>
+          <a:solidFill>
+            <a:srgbClr val="FDF1E6"/>
+          </a:solidFill>
+          <a:ln w="19050">
+            <a:solidFill>
+              <a:srgbClr val="D36B16"/>
+            </a:solidFill>
+            <a:prstDash val="dash"/>
+          </a:ln>
+          <a:effectLst/>
+        </p:spPr>
+        <p:style>
+          <a:lnRef idx="1">
+            <a:schemeClr val="accent1"/>
+          </a:lnRef>
+          <a:fillRef idx="3">
+            <a:schemeClr val="accent1"/>
+          </a:fillRef>
+          <a:effectRef idx="2">
+            <a:schemeClr val="accent1"/>
+          </a:effectRef>
+          <a:fontRef idx="minor">
+            <a:schemeClr val="lt1"/>
+          </a:fontRef>
+        </p:style>
+        <p:txBody>
+          <a:bodyPr rtlCol="0" anchor="ctr" wrap="square" lIns="45720" rIns="45720" tIns="18288" bIns="18288"/>
+          <a:lstStyle/>
+          <a:p>
+            <a:pPr algn="ctr"/>
+            <a:r>
+              <a:rPr sz="900" b="1" i="0">
+                <a:solidFill>
+                  <a:srgbClr val="D36B16"/>
+                </a:solidFill>
+                <a:latin typeface="Arial"/>
+              </a:rPr>
+              <a:t>A2  QUERY-BASED RF</a:t>
+            </a:r>
+          </a:p>
+          <a:p>
+            <a:pPr algn="ctr"/>
+            <a:r>
+              <a:rPr sz="700" b="0" i="0">
+                <a:solidFill>
+                  <a:srgbClr val="6B6B6B"/>
+                </a:solidFill>
+                <a:latin typeface="Arial"/>
+              </a:rPr>
+              <a:t>black-box deployment model</a:t>
+            </a:r>
+          </a:p>
+        </p:txBody>
+      </p:sp>
+      <p:sp>
+        <p:nvSpPr>
+          <p:cNvPr id="192" name="Tier A0"/>
+          <p:cNvSpPr/>
+          <p:nvPr/>
+        </p:nvSpPr>
+        <p:spPr>
+          <a:xfrm>
+            <a:off x="4114800" y="2267712"/>
+            <a:ext cx="2011680" cy="384048"/>
+          </a:xfrm>
+          <a:prstGeom prst="roundRect">
+            <a:avLst>
+              <a:gd name="adj" fmla="val 8000"/>
+            </a:avLst>
+          </a:prstGeom>
+          <a:solidFill>
+            <a:srgbClr val="F1F3F6"/>
+          </a:solidFill>
+          <a:ln w="19050">
+            <a:solidFill>
+              <a:srgbClr val="333333"/>
+            </a:solidFill>
+          </a:ln>
+          <a:effectLst/>
+        </p:spPr>
+        <p:style>
+          <a:lnRef idx="1">
+            <a:schemeClr val="accent1"/>
+          </a:lnRef>
+          <a:fillRef idx="3">
+            <a:schemeClr val="accent1"/>
+          </a:fillRef>
+          <a:effectRef idx="2">
+            <a:schemeClr val="accent1"/>
+          </a:effectRef>
+          <a:fontRef idx="minor">
+            <a:schemeClr val="lt1"/>
+          </a:fontRef>
+        </p:style>
+        <p:txBody>
+          <a:bodyPr rtlCol="0" anchor="ctr" wrap="square" lIns="45720" rIns="45720" tIns="18288" bIns="18288"/>
+          <a:lstStyle/>
+          <a:p>
+            <a:pPr algn="ctr"/>
+            <a:r>
+              <a:rPr sz="900" b="1" i="0">
+                <a:solidFill>
+                  <a:srgbClr val="333333"/>
+                </a:solidFill>
+                <a:latin typeface="Arial"/>
+              </a:rPr>
+              <a:t>A0  DIGITAL INJECTION</a:t>
+            </a:r>
+          </a:p>
+          <a:p>
+            <a:pPr algn="ctr"/>
+            <a:r>
+              <a:rPr sz="700" b="0" i="0">
+                <a:solidFill>
+                  <a:srgbClr val="6B6B6B"/>
+                </a:solidFill>
+                <a:latin typeface="Arial"/>
+              </a:rPr>
+              <a:t>algorithmic upper bound</a:t>
+            </a:r>
+          </a:p>
+        </p:txBody>
+      </p:sp>
+      <p:cxnSp>
+        <p:nvCxnSpPr>
+          <p:cNvPr id="193" name="Connector 192"/>
+          <p:cNvCxnSpPr/>
+          <p:nvPr/>
+        </p:nvCxnSpPr>
+        <p:spPr>
+          <a:xfrm flipV="1">
+            <a:off x="731520" y="1993392"/>
+            <a:ext cx="0" cy="274320"/>
+          </a:xfrm>
+          <a:prstGeom prst="line">
+            <a:avLst/>
+          </a:prstGeom>
+          <a:ln w="15875">
+            <a:solidFill>
+              <a:srgbClr val="1F6FB2"/>
+            </a:solidFill>
+            <a:tailEnd type="triangle" w="med" len="med"/>
+          </a:ln>
+        </p:spPr>
+        <p:style>
+          <a:lnRef idx="2">
+            <a:schemeClr val="accent1"/>
+          </a:lnRef>
+          <a:fillRef idx="0">
+            <a:schemeClr val="accent1"/>
+          </a:fillRef>
+          <a:effectRef idx="1">
+            <a:schemeClr val="accent1"/>
+          </a:effectRef>
+          <a:fontRef idx="minor">
+            <a:schemeClr val="tx1"/>
+          </a:fontRef>
+        </p:style>
+      </p:cxnSp>
+      <p:cxnSp>
+        <p:nvCxnSpPr>
+          <p:cNvPr id="194" name="Connector 193"/>
+          <p:cNvCxnSpPr/>
+          <p:nvPr/>
+        </p:nvCxnSpPr>
+        <p:spPr>
+          <a:xfrm flipH="1" flipV="1">
+            <a:off x="914400" y="1993392"/>
+            <a:ext cx="2167128" cy="274320"/>
+          </a:xfrm>
+          <a:prstGeom prst="line">
+            <a:avLst/>
+          </a:prstGeom>
+          <a:ln w="15875">
+            <a:solidFill>
+              <a:srgbClr val="D36B16"/>
+            </a:solidFill>
+            <a:prstDash val="dash"/>
+            <a:tailEnd type="triangle" w="med" len="med"/>
+          </a:ln>
+        </p:spPr>
+        <p:style>
+          <a:lnRef idx="2">
+            <a:schemeClr val="accent1"/>
+          </a:lnRef>
+          <a:fillRef idx="0">
+            <a:schemeClr val="accent1"/>
+          </a:fillRef>
+          <a:effectRef idx="1">
+            <a:schemeClr val="accent1"/>
+          </a:effectRef>
+          <a:fontRef idx="minor">
+            <a:schemeClr val="tx1"/>
+          </a:fontRef>
+        </p:style>
+      </p:cxnSp>
+      <p:cxnSp>
+        <p:nvCxnSpPr>
+          <p:cNvPr id="195" name="Connector 194"/>
+          <p:cNvCxnSpPr/>
+          <p:nvPr/>
+        </p:nvCxnSpPr>
+        <p:spPr>
+          <a:xfrm flipH="1" flipV="1">
+            <a:off x="3941063" y="1993392"/>
+            <a:ext cx="1179577" cy="274320"/>
+          </a:xfrm>
+          <a:prstGeom prst="line">
+            <a:avLst/>
+          </a:prstGeom>
+          <a:ln w="15875">
+            <a:solidFill>
+              <a:srgbClr val="4A5568"/>
+            </a:solidFill>
+            <a:tailEnd type="triangle" w="med" len="med"/>
+          </a:ln>
+        </p:spPr>
+        <p:style>
+          <a:lnRef idx="2">
+            <a:schemeClr val="accent1"/>
+          </a:lnRef>
+          <a:fillRef idx="0">
+            <a:schemeClr val="accent1"/>
+          </a:fillRef>
+          <a:effectRef idx="1">
+            <a:schemeClr val="accent1"/>
+          </a:effectRef>
+          <a:fontRef idx="minor">
+            <a:schemeClr val="tx1"/>
+          </a:fontRef>
+        </p:style>
+      </p:cxnSp>
+      <p:sp>
+        <p:nvSpPr>
+          <p:cNvPr id="196" name="This work note"/>
+          <p:cNvSpPr/>
+          <p:nvPr/>
+        </p:nvSpPr>
+        <p:spPr>
+          <a:xfrm>
+            <a:off x="6263640" y="2240280"/>
+            <a:ext cx="2606040" cy="438912"/>
+          </a:xfrm>
+          <a:prstGeom prst="roundRect">
+            <a:avLst>
+              <a:gd name="adj" fmla="val 8000"/>
+            </a:avLst>
+          </a:prstGeom>
+          <a:solidFill>
+            <a:srgbClr val="FDECEA"/>
+          </a:solidFill>
+          <a:ln w="12700">
+            <a:solidFill>
+              <a:srgbClr val="C0392B"/>
+            </a:solidFill>
+          </a:ln>
+          <a:effectLst/>
+        </p:spPr>
+        <p:style>
+          <a:lnRef idx="1">
+            <a:schemeClr val="accent1"/>
+          </a:lnRef>
+          <a:fillRef idx="3">
+            <a:schemeClr val="accent1"/>
+          </a:fillRef>
+          <a:effectRef idx="2">
+            <a:schemeClr val="accent1"/>
+          </a:effectRef>
+          <a:fontRef idx="minor">
+            <a:schemeClr val="lt1"/>
+          </a:fontRef>
+        </p:style>
+        <p:txBody>
+          <a:bodyPr rtlCol="0" anchor="ctr" wrap="square" lIns="45720" rIns="45720" tIns="18288" bIns="18288"/>
+          <a:lstStyle/>
+          <a:p>
+            <a:pPr algn="l"/>
+            <a:r>
+              <a:rPr sz="900" b="1" i="0">
+                <a:solidFill>
+                  <a:srgbClr val="C0392B"/>
+                </a:solidFill>
+                <a:latin typeface="Arial"/>
+              </a:rPr>
+              <a:t>All results in this talk: A0</a:t>
+            </a:r>
+          </a:p>
+          <a:p>
+            <a:pPr algn="l"/>
+            <a:r>
+              <a:rPr sz="750" b="0" i="0">
+                <a:solidFill>
+                  <a:srgbClr val="333333"/>
+                </a:solidFill>
+                <a:latin typeface="Arial"/>
+              </a:rPr>
+              <a:t>defense-unaware; next: A1 cabled / OTA + BPDA / EOT</a:t>
+            </a:r>
+          </a:p>
+        </p:txBody>
+      </p:sp>
+      <p:graphicFrame>
+        <p:nvGraphicFramePr>
+          <p:cNvPr id="197" name="Attacker tier table"/>
+          <p:cNvGraphicFramePr>
+            <a:graphicFrameLocks noGrp="1"/>
+          </p:cNvGraphicFramePr>
+          <p:nvPr/>
+        </p:nvGraphicFramePr>
+        <p:xfrm>
+          <a:off x="274320" y="2779776"/>
+          <a:ext cx="8595360" cy="1664208"/>
+        </p:xfrm>
+        <a:graphic>
+          <a:graphicData uri="http://schemas.openxmlformats.org/drawingml/2006/table">
+            <a:tbl>
+              <a:tblPr firstRow="1">
+                <a:tableStyleId>{5C22544A-7EE6-4342-B048-85BDC9FD1C3A}</a:tableStyleId>
+              </a:tblPr>
+              <a:tblGrid>
+                <a:gridCol w="1463040"/>
+                <a:gridCol w="2377440"/>
+                <a:gridCol w="2377440"/>
+                <a:gridCol w="2377440"/>
+              </a:tblGrid>
+              <a:tr h="237744">
+                <a:tc>
+                  <a:txBody>
+                    <a:bodyPr/>
+                    <a:lstStyle/>
+                    <a:p>
+                      <a:r>
+                        <a:rPr sz="800" b="1">
+                          <a:solidFill>
+                            <a:srgbClr val="333333"/>
+                          </a:solidFill>
+                          <a:latin typeface="Arial"/>
+                        </a:rPr>
+                        <a:t>Attribute</a:t>
+                      </a:r>
+                    </a:p>
+                  </a:txBody>
+                  <a:tcPr marL="54864" marR="54864" marT="18288" marB="18288" anchor="ctr">
+                    <a:solidFill>
+                      <a:srgbClr val="E4E8EE"/>
+                    </a:solidFill>
+                  </a:tcPr>
+                </a:tc>
+                <a:tc>
+                  <a:txBody>
+                    <a:bodyPr/>
+                    <a:lstStyle/>
+                    <a:p>
+                      <a:r>
+                        <a:rPr sz="800" b="1">
+                          <a:solidFill>
+                            <a:srgbClr val="333333"/>
+                          </a:solidFill>
+                          <a:latin typeface="Arial"/>
+                        </a:rPr>
+                        <a:t>A0 — Digital injection</a:t>
+                      </a:r>
+                    </a:p>
+                  </a:txBody>
+                  <a:tcPr marL="54864" marR="54864" marT="18288" marB="18288" anchor="ctr">
+                    <a:solidFill>
+                      <a:srgbClr val="F1F3F6"/>
+                    </a:solidFill>
+                  </a:tcPr>
+                </a:tc>
+                <a:tc>
+                  <a:txBody>
+                    <a:bodyPr/>
+                    <a:lstStyle/>
+                    <a:p>
+                      <a:r>
+                        <a:rPr sz="800" b="1">
+                          <a:solidFill>
+                            <a:srgbClr val="1F6FB2"/>
+                          </a:solidFill>
+                          <a:latin typeface="Arial"/>
+                        </a:rPr>
+                        <a:t>A1 — Controlled RF</a:t>
+                      </a:r>
+                    </a:p>
+                  </a:txBody>
+                  <a:tcPr marL="54864" marR="54864" marT="18288" marB="18288" anchor="ctr">
+                    <a:solidFill>
+                      <a:srgbClr val="E8F1FA"/>
+                    </a:solidFill>
+                  </a:tcPr>
+                </a:tc>
+                <a:tc>
+                  <a:txBody>
+                    <a:bodyPr/>
+                    <a:lstStyle/>
+                    <a:p>
+                      <a:r>
+                        <a:rPr sz="800" b="1">
+                          <a:solidFill>
+                            <a:srgbClr val="D36B16"/>
+                          </a:solidFill>
+                          <a:latin typeface="Arial"/>
+                        </a:rPr>
+                        <a:t>A2 — Query-based RF</a:t>
+                      </a:r>
+                    </a:p>
+                  </a:txBody>
+                  <a:tcPr marL="54864" marR="54864" marT="18288" marB="18288" anchor="ctr">
+                    <a:solidFill>
+                      <a:srgbClr val="FDF1E6"/>
+                    </a:solidFill>
+                  </a:tcPr>
+                </a:tc>
+              </a:tr>
+              <a:tr h="237744">
+                <a:tc>
+                  <a:txBody>
+                    <a:bodyPr/>
+                    <a:lstStyle/>
+                    <a:p>
+                      <a:r>
+                        <a:rPr sz="800" b="1">
+                          <a:solidFill>
+                            <a:srgbClr val="333333"/>
+                          </a:solidFill>
+                          <a:latin typeface="Arial"/>
+                        </a:rPr>
+                        <a:t>Injection interface</a:t>
+                      </a:r>
+                    </a:p>
+                  </a:txBody>
+                  <a:tcPr marL="54864" marR="54864" marT="18288" marB="18288" anchor="ctr">
+                    <a:solidFill>
+                      <a:srgbClr val="F1F3F6"/>
+                    </a:solidFill>
+                  </a:tcPr>
+                </a:tc>
+                <a:tc>
+                  <a:txBody>
+                    <a:bodyPr/>
+                    <a:lstStyle/>
+                    <a:p>
+                      <a:r>
+                        <a:rPr sz="800" b="0">
+                          <a:solidFill>
+                            <a:srgbClr val="333333"/>
+                          </a:solidFill>
+                          <a:latin typeface="Arial"/>
+                        </a:rPr>
+                        <a:t>Direct offline IQ edit</a:t>
+                      </a:r>
+                    </a:p>
+                  </a:txBody>
+                  <a:tcPr marL="54864" marR="54864" marT="18288" marB="18288" anchor="ctr">
+                    <a:solidFill>
+                      <a:srgbClr val="FFFFFF"/>
+                    </a:solidFill>
+                  </a:tcPr>
+                </a:tc>
+                <a:tc>
+                  <a:txBody>
+                    <a:bodyPr/>
+                    <a:lstStyle/>
+                    <a:p>
+                      <a:r>
+                        <a:rPr sz="800" b="0">
+                          <a:solidFill>
+                            <a:srgbClr val="333333"/>
+                          </a:solidFill>
+                          <a:latin typeface="Arial"/>
+                        </a:rPr>
+                        <a:t>Independent SDR through RF</a:t>
+                      </a:r>
+                    </a:p>
+                  </a:txBody>
+                  <a:tcPr marL="54864" marR="54864" marT="18288" marB="18288" anchor="ctr">
+                    <a:solidFill>
+                      <a:srgbClr val="FFFFFF"/>
+                    </a:solidFill>
+                  </a:tcPr>
+                </a:tc>
+                <a:tc>
+                  <a:txBody>
+                    <a:bodyPr/>
+                    <a:lstStyle/>
+                    <a:p>
+                      <a:r>
+                        <a:rPr sz="800" b="0">
+                          <a:solidFill>
+                            <a:srgbClr val="333333"/>
+                          </a:solidFill>
+                          <a:latin typeface="Arial"/>
+                        </a:rPr>
+                        <a:t>Independent SDR through RF</a:t>
+                      </a:r>
+                    </a:p>
+                  </a:txBody>
+                  <a:tcPr marL="54864" marR="54864" marT="18288" marB="18288" anchor="ctr">
+                    <a:solidFill>
+                      <a:srgbClr val="FFFFFF"/>
+                    </a:solidFill>
+                  </a:tcPr>
+                </a:tc>
+              </a:tr>
+              <a:tr h="237744">
+                <a:tc>
+                  <a:txBody>
+                    <a:bodyPr/>
+                    <a:lstStyle/>
+                    <a:p>
+                      <a:r>
+                        <a:rPr sz="800" b="1">
+                          <a:solidFill>
+                            <a:srgbClr val="333333"/>
+                          </a:solidFill>
+                          <a:latin typeface="Arial"/>
+                        </a:rPr>
+                        <a:t>Knowledge</a:t>
+                      </a:r>
+                    </a:p>
+                  </a:txBody>
+                  <a:tcPr marL="54864" marR="54864" marT="18288" marB="18288" anchor="ctr">
+                    <a:solidFill>
+                      <a:srgbClr val="F1F3F6"/>
+                    </a:solidFill>
+                  </a:tcPr>
+                </a:tc>
+                <a:tc>
+                  <a:txBody>
+                    <a:bodyPr/>
+                    <a:lstStyle/>
+                    <a:p>
+                      <a:r>
+                        <a:rPr sz="800" b="0">
+                          <a:solidFill>
+                            <a:srgbClr val="333333"/>
+                          </a:solidFill>
+                          <a:latin typeface="Arial"/>
+                        </a:rPr>
+                        <a:t>Full pipeline + weights</a:t>
+                      </a:r>
+                    </a:p>
+                  </a:txBody>
+                  <a:tcPr marL="54864" marR="54864" marT="18288" marB="18288" anchor="ctr">
+                    <a:solidFill>
+                      <a:srgbClr val="FFFFFF"/>
+                    </a:solidFill>
+                  </a:tcPr>
+                </a:tc>
+                <a:tc>
+                  <a:txBody>
+                    <a:bodyPr/>
+                    <a:lstStyle/>
+                    <a:p>
+                      <a:r>
+                        <a:rPr sz="800" b="0">
+                          <a:solidFill>
+                            <a:srgbClr val="333333"/>
+                          </a:solidFill>
+                          <a:latin typeface="Arial"/>
+                        </a:rPr>
+                        <a:t>Known design; same / surrogate model</a:t>
+                      </a:r>
+                    </a:p>
+                  </a:txBody>
+                  <a:tcPr marL="54864" marR="54864" marT="18288" marB="18288" anchor="ctr">
+                    <a:solidFill>
+                      <a:srgbClr val="FFFFFF"/>
+                    </a:solidFill>
+                  </a:tcPr>
+                </a:tc>
+                <a:tc>
+                  <a:txBody>
+                    <a:bodyPr/>
+                    <a:lstStyle/>
+                    <a:p>
+                      <a:r>
+                        <a:rPr sz="800" b="0">
+                          <a:solidFill>
+                            <a:srgbClr val="333333"/>
+                          </a:solidFill>
+                          <a:latin typeface="Arial"/>
+                        </a:rPr>
+                        <a:t>Approximate architecture only</a:t>
+                      </a:r>
+                    </a:p>
+                  </a:txBody>
+                  <a:tcPr marL="54864" marR="54864" marT="18288" marB="18288" anchor="ctr">
+                    <a:solidFill>
+                      <a:srgbClr val="FFFFFF"/>
+                    </a:solidFill>
+                  </a:tcPr>
+                </a:tc>
+              </a:tr>
+              <a:tr h="237744">
+                <a:tc>
+                  <a:txBody>
+                    <a:bodyPr/>
+                    <a:lstStyle/>
+                    <a:p>
+                      <a:r>
+                        <a:rPr sz="800" b="1">
+                          <a:solidFill>
+                            <a:srgbClr val="333333"/>
+                          </a:solidFill>
+                          <a:latin typeface="Arial"/>
+                        </a:rPr>
+                        <a:t>Optimization signal</a:t>
+                      </a:r>
+                    </a:p>
+                  </a:txBody>
+                  <a:tcPr marL="54864" marR="54864" marT="18288" marB="18288" anchor="ctr">
+                    <a:solidFill>
+                      <a:srgbClr val="F1F3F6"/>
+                    </a:solidFill>
+                  </a:tcPr>
+                </a:tc>
+                <a:tc>
+                  <a:txBody>
+                    <a:bodyPr/>
+                    <a:lstStyle/>
+                    <a:p>
+                      <a:r>
+                        <a:rPr sz="800" b="0">
+                          <a:solidFill>
+                            <a:srgbClr val="333333"/>
+                          </a:solidFill>
+                          <a:latin typeface="Arial"/>
+                        </a:rPr>
+                        <a:t>Exact gradients + logits</a:t>
+                      </a:r>
+                    </a:p>
+                  </a:txBody>
+                  <a:tcPr marL="54864" marR="54864" marT="18288" marB="18288" anchor="ctr">
+                    <a:solidFill>
+                      <a:srgbClr val="FFFFFF"/>
+                    </a:solidFill>
+                  </a:tcPr>
+                </a:tc>
+                <a:tc>
+                  <a:txBody>
+                    <a:bodyPr/>
+                    <a:lstStyle/>
+                    <a:p>
+                      <a:r>
+                        <a:rPr sz="800" b="0">
+                          <a:solidFill>
+                            <a:srgbClr val="333333"/>
+                          </a:solidFill>
+                          <a:latin typeface="Arial"/>
+                        </a:rPr>
+                        <a:t>Channel-aware white / gray box</a:t>
+                      </a:r>
+                    </a:p>
+                  </a:txBody>
+                  <a:tcPr marL="54864" marR="54864" marT="18288" marB="18288" anchor="ctr">
+                    <a:solidFill>
+                      <a:srgbClr val="FFFFFF"/>
+                    </a:solidFill>
+                  </a:tcPr>
+                </a:tc>
+                <a:tc>
+                  <a:txBody>
+                    <a:bodyPr/>
+                    <a:lstStyle/>
+                    <a:p>
+                      <a:r>
+                        <a:rPr sz="800" b="0">
+                          <a:solidFill>
+                            <a:srgbClr val="333333"/>
+                          </a:solidFill>
+                          <a:latin typeface="Arial"/>
+                        </a:rPr>
+                        <a:t>Transfer or zeroth-order queries</a:t>
+                      </a:r>
+                    </a:p>
+                  </a:txBody>
+                  <a:tcPr marL="54864" marR="54864" marT="18288" marB="18288" anchor="ctr">
+                    <a:solidFill>
+                      <a:srgbClr val="FFFFFF"/>
+                    </a:solidFill>
+                  </a:tcPr>
+                </a:tc>
+              </a:tr>
+              <a:tr h="237744">
+                <a:tc>
+                  <a:txBody>
+                    <a:bodyPr/>
+                    <a:lstStyle/>
+                    <a:p>
+                      <a:r>
+                        <a:rPr sz="800" b="1">
+                          <a:solidFill>
+                            <a:srgbClr val="333333"/>
+                          </a:solidFill>
+                          <a:latin typeface="Arial"/>
+                        </a:rPr>
+                        <a:t>Timing / channel</a:t>
+                      </a:r>
+                    </a:p>
+                  </a:txBody>
+                  <a:tcPr marL="54864" marR="54864" marT="18288" marB="18288" anchor="ctr">
+                    <a:solidFill>
+                      <a:srgbClr val="F1F3F6"/>
+                    </a:solidFill>
+                  </a:tcPr>
+                </a:tc>
+                <a:tc>
+                  <a:txBody>
+                    <a:bodyPr/>
+                    <a:lstStyle/>
+                    <a:p>
+                      <a:r>
+                        <a:rPr sz="800" b="0">
+                          <a:solidFill>
+                            <a:srgbClr val="333333"/>
+                          </a:solidFill>
+                          <a:latin typeface="Arial"/>
+                        </a:rPr>
+                        <a:t>Exact; no RF channel</a:t>
+                      </a:r>
+                    </a:p>
+                  </a:txBody>
+                  <a:tcPr marL="54864" marR="54864" marT="18288" marB="18288" anchor="ctr">
+                    <a:solidFill>
+                      <a:srgbClr val="FFFFFF"/>
+                    </a:solidFill>
+                  </a:tcPr>
+                </a:tc>
+                <a:tc>
+                  <a:txBody>
+                    <a:bodyPr/>
+                    <a:lstStyle/>
+                    <a:p>
+                      <a:r>
+                        <a:rPr sz="800" b="0">
+                          <a:solidFill>
+                            <a:srgbClr val="333333"/>
+                          </a:solidFill>
+                          <a:latin typeface="Arial"/>
+                        </a:rPr>
+                        <a:t>Finite delay; own channel estimate</a:t>
+                      </a:r>
+                    </a:p>
+                  </a:txBody>
+                  <a:tcPr marL="54864" marR="54864" marT="18288" marB="18288" anchor="ctr">
+                    <a:solidFill>
+                      <a:srgbClr val="FFFFFF"/>
+                    </a:solidFill>
+                  </a:tcPr>
+                </a:tc>
+                <a:tc>
+                  <a:txBody>
+                    <a:bodyPr/>
+                    <a:lstStyle/>
+                    <a:p>
+                      <a:r>
+                        <a:rPr sz="800" b="0">
+                          <a:solidFill>
+                            <a:srgbClr val="333333"/>
+                          </a:solidFill>
+                          <a:latin typeface="Arial"/>
+                        </a:rPr>
+                        <a:t>Coarse timing; uncertain channel</a:t>
+                      </a:r>
+                    </a:p>
+                  </a:txBody>
+                  <a:tcPr marL="54864" marR="54864" marT="18288" marB="18288" anchor="ctr">
+                    <a:solidFill>
+                      <a:srgbClr val="FFFFFF"/>
+                    </a:solidFill>
+                  </a:tcPr>
+                </a:tc>
+              </a:tr>
+              <a:tr h="237744">
+                <a:tc>
+                  <a:txBody>
+                    <a:bodyPr/>
+                    <a:lstStyle/>
+                    <a:p>
+                      <a:r>
+                        <a:rPr sz="800" b="1">
+                          <a:solidFill>
+                            <a:srgbClr val="333333"/>
+                          </a:solidFill>
+                          <a:latin typeface="Arial"/>
+                        </a:rPr>
+                        <a:t>Resource limits</a:t>
+                      </a:r>
+                    </a:p>
+                  </a:txBody>
+                  <a:tcPr marL="54864" marR="54864" marT="18288" marB="18288" anchor="ctr">
+                    <a:solidFill>
+                      <a:srgbClr val="F1F3F6"/>
+                    </a:solidFill>
+                  </a:tcPr>
+                </a:tc>
+                <a:tc>
+                  <a:txBody>
+                    <a:bodyPr/>
+                    <a:lstStyle/>
+                    <a:p>
+                      <a:r>
+                        <a:rPr sz="800" b="0">
+                          <a:solidFill>
+                            <a:srgbClr val="333333"/>
+                          </a:solidFill>
+                          <a:latin typeface="Arial"/>
+                        </a:rPr>
+                        <a:t>Digital perturbation budget</a:t>
+                      </a:r>
+                    </a:p>
+                  </a:txBody>
+                  <a:tcPr marL="54864" marR="54864" marT="18288" marB="18288" anchor="ctr">
+                    <a:solidFill>
+                      <a:srgbClr val="FFFFFF"/>
+                    </a:solidFill>
+                  </a:tcPr>
+                </a:tc>
+                <a:tc>
+                  <a:txBody>
+                    <a:bodyPr/>
+                    <a:lstStyle/>
+                    <a:p>
+                      <a:r>
+                        <a:rPr sz="800" b="0">
+                          <a:solidFill>
+                            <a:srgbClr val="333333"/>
+                          </a:solidFill>
+                          <a:latin typeface="Arial"/>
+                        </a:rPr>
+                        <a:t>Power, BW, duty, CFO, duration</a:t>
+                      </a:r>
+                    </a:p>
+                  </a:txBody>
+                  <a:tcPr marL="54864" marR="54864" marT="18288" marB="18288" anchor="ctr">
+                    <a:solidFill>
+                      <a:srgbClr val="FFFFFF"/>
+                    </a:solidFill>
+                  </a:tcPr>
+                </a:tc>
+                <a:tc>
+                  <a:txBody>
+                    <a:bodyPr/>
+                    <a:lstStyle/>
+                    <a:p>
+                      <a:r>
+                        <a:rPr sz="800" b="0">
+                          <a:solidFill>
+                            <a:srgbClr val="333333"/>
+                          </a:solidFill>
+                          <a:latin typeface="Arial"/>
+                        </a:rPr>
+                        <a:t>RF limits + query / airtime budget</a:t>
+                      </a:r>
+                    </a:p>
+                  </a:txBody>
+                  <a:tcPr marL="54864" marR="54864" marT="18288" marB="18288" anchor="ctr">
+                    <a:solidFill>
+                      <a:srgbClr val="FFFFFF"/>
+                    </a:solidFill>
+                  </a:tcPr>
+                </a:tc>
+              </a:tr>
+              <a:tr h="237744">
+                <a:tc>
+                  <a:txBody>
+                    <a:bodyPr/>
+                    <a:lstStyle/>
+                    <a:p>
+                      <a:r>
+                        <a:rPr sz="800" b="1">
+                          <a:solidFill>
+                            <a:srgbClr val="333333"/>
+                          </a:solidFill>
+                          <a:latin typeface="Arial"/>
+                        </a:rPr>
+                        <a:t>Evidence role</a:t>
+                      </a:r>
+                    </a:p>
+                  </a:txBody>
+                  <a:tcPr marL="54864" marR="54864" marT="18288" marB="18288" anchor="ctr">
+                    <a:solidFill>
+                      <a:srgbClr val="F1F3F6"/>
+                    </a:solidFill>
+                  </a:tcPr>
+                </a:tc>
+                <a:tc>
+                  <a:txBody>
+                    <a:bodyPr/>
+                    <a:lstStyle/>
+                    <a:p>
+                      <a:r>
+                        <a:rPr sz="800" b="0">
+                          <a:solidFill>
+                            <a:srgbClr val="333333"/>
+                          </a:solidFill>
+                          <a:latin typeface="Arial"/>
+                        </a:rPr>
+                        <a:t>Debugging / worst-case bound</a:t>
+                      </a:r>
+                    </a:p>
+                  </a:txBody>
+                  <a:tcPr marL="54864" marR="54864" marT="18288" marB="18288" anchor="ctr">
+                    <a:solidFill>
+                      <a:srgbClr val="FFFFFF"/>
+                    </a:solidFill>
+                  </a:tcPr>
+                </a:tc>
+                <a:tc>
+                  <a:txBody>
+                    <a:bodyPr/>
+                    <a:lstStyle/>
+                    <a:p>
+                      <a:r>
+                        <a:rPr sz="800" b="0">
+                          <a:solidFill>
+                            <a:srgbClr val="333333"/>
+                          </a:solidFill>
+                          <a:latin typeface="Arial"/>
+                        </a:rPr>
+                        <a:t>Primary practical RF claims</a:t>
+                      </a:r>
+                    </a:p>
+                  </a:txBody>
+                  <a:tcPr marL="54864" marR="54864" marT="18288" marB="18288" anchor="ctr">
+                    <a:solidFill>
+                      <a:srgbClr val="FFFFFF"/>
+                    </a:solidFill>
+                  </a:tcPr>
+                </a:tc>
+                <a:tc>
+                  <a:txBody>
+                    <a:bodyPr/>
+                    <a:lstStyle/>
+                    <a:p>
+                      <a:r>
+                        <a:rPr sz="800" b="0">
+                          <a:solidFill>
+                            <a:srgbClr val="333333"/>
+                          </a:solidFill>
+                          <a:latin typeface="Arial"/>
+                        </a:rPr>
+                        <a:t>Information-limited deployment risk</a:t>
+                      </a:r>
+                    </a:p>
+                  </a:txBody>
+                  <a:tcPr marL="54864" marR="54864" marT="18288" marB="18288" anchor="ctr">
+                    <a:solidFill>
+                      <a:srgbClr val="FFFFFF"/>
+                    </a:solidFill>
+                  </a:tcPr>
+                </a:tc>
+              </a:tr>
+            </a:tbl>
+          </a:graphicData>
+        </a:graphic>
+      </p:graphicFrame>
+      <p:sp>
+        <p:nvSpPr>
+          <p:cNvPr id="198" name="Exclusions"/>
+          <p:cNvSpPr/>
+          <p:nvPr/>
+        </p:nvSpPr>
+        <p:spPr>
+          <a:xfrm>
+            <a:off x="274320" y="4453128"/>
+            <a:ext cx="8595360" cy="347472"/>
+          </a:xfrm>
+          <a:prstGeom prst="roundRect">
+            <a:avLst>
+              <a:gd name="adj" fmla="val 15000"/>
+            </a:avLst>
+          </a:prstGeom>
+          <a:solidFill>
+            <a:srgbClr val="F1F3F6"/>
+          </a:solidFill>
+          <a:ln w="9525">
+            <a:solidFill>
+              <a:srgbClr val="4A5568"/>
+            </a:solidFill>
+          </a:ln>
+          <a:effectLst/>
+        </p:spPr>
+        <p:style>
+          <a:lnRef idx="1">
+            <a:schemeClr val="accent1"/>
+          </a:lnRef>
+          <a:fillRef idx="3">
+            <a:schemeClr val="accent1"/>
+          </a:fillRef>
+          <a:effectRef idx="2">
+            <a:schemeClr val="accent1"/>
+          </a:effectRef>
+          <a:fontRef idx="minor">
+            <a:schemeClr val="lt1"/>
+          </a:fontRef>
+        </p:style>
+        <p:txBody>
+          <a:bodyPr rtlCol="0" anchor="ctr" wrap="square" lIns="45720" rIns="45720" tIns="18288" bIns="18288"/>
+          <a:lstStyle/>
+          <a:p>
+            <a:pPr algn="l"/>
+            <a:r>
+              <a:rPr sz="800" b="1" i="0">
+                <a:solidFill>
+                  <a:srgbClr val="333333"/>
+                </a:solidFill>
+                <a:latin typeface="Arial"/>
+              </a:rPr>
+              <a:t>Excluded for all tiers: </a:t>
+            </a:r>
+            <a:r>
+              <a:rPr sz="800" b="0" i="0">
+                <a:solidFill>
+                  <a:srgbClr val="333333"/>
+                </a:solidFill>
+                <a:latin typeface="Arial"/>
+              </a:rPr>
+              <a:t>host compromise, checkpoint replacement, evidence-store modification, metadata tampering.  A1 / A2 are additive asynchronous transmitters, not phase-synced cancellers.</a:t>
             </a:r>
           </a:p>
         </p:txBody>
